--- a/ゲーム科2年/00_前期/ゲーム開発Ⅲ/ゲーム物理学/座学/18_合力.pptx
+++ b/ゲーム科2年/00_前期/ゲーム開発Ⅲ/ゲーム物理学/座学/18_合力.pptx
@@ -270,7 +270,7 @@
           <a:p>
             <a:fld id="{E9CC885B-4903-4D54-9A93-00025F12DED9}" type="datetimeFigureOut">
               <a:rPr kumimoji="1" lang="ja-JP" altLang="en-US" smtClean="0"/>
-              <a:t>2025/9/30</a:t>
+              <a:t>2025/10/31</a:t>
             </a:fld>
             <a:endParaRPr kumimoji="1" lang="ja-JP" altLang="en-US"/>
           </a:p>
@@ -500,7 +500,7 @@
           <a:p>
             <a:fld id="{E9CC885B-4903-4D54-9A93-00025F12DED9}" type="datetimeFigureOut">
               <a:rPr kumimoji="1" lang="ja-JP" altLang="en-US" smtClean="0"/>
-              <a:t>2025/9/30</a:t>
+              <a:t>2025/10/31</a:t>
             </a:fld>
             <a:endParaRPr kumimoji="1" lang="ja-JP" altLang="en-US"/>
           </a:p>
@@ -740,7 +740,7 @@
           <a:p>
             <a:fld id="{E9CC885B-4903-4D54-9A93-00025F12DED9}" type="datetimeFigureOut">
               <a:rPr kumimoji="1" lang="ja-JP" altLang="en-US" smtClean="0"/>
-              <a:t>2025/9/30</a:t>
+              <a:t>2025/10/31</a:t>
             </a:fld>
             <a:endParaRPr kumimoji="1" lang="ja-JP" altLang="en-US"/>
           </a:p>
@@ -970,7 +970,7 @@
           <a:p>
             <a:fld id="{E9CC885B-4903-4D54-9A93-00025F12DED9}" type="datetimeFigureOut">
               <a:rPr kumimoji="1" lang="ja-JP" altLang="en-US" smtClean="0"/>
-              <a:t>2025/9/30</a:t>
+              <a:t>2025/10/31</a:t>
             </a:fld>
             <a:endParaRPr kumimoji="1" lang="ja-JP" altLang="en-US"/>
           </a:p>
@@ -1245,7 +1245,7 @@
           <a:p>
             <a:fld id="{E9CC885B-4903-4D54-9A93-00025F12DED9}" type="datetimeFigureOut">
               <a:rPr kumimoji="1" lang="ja-JP" altLang="en-US" smtClean="0"/>
-              <a:t>2025/9/30</a:t>
+              <a:t>2025/10/31</a:t>
             </a:fld>
             <a:endParaRPr kumimoji="1" lang="ja-JP" altLang="en-US"/>
           </a:p>
@@ -1574,7 +1574,7 @@
           <a:p>
             <a:fld id="{E9CC885B-4903-4D54-9A93-00025F12DED9}" type="datetimeFigureOut">
               <a:rPr kumimoji="1" lang="ja-JP" altLang="en-US" smtClean="0"/>
-              <a:t>2025/9/30</a:t>
+              <a:t>2025/10/31</a:t>
             </a:fld>
             <a:endParaRPr kumimoji="1" lang="ja-JP" altLang="en-US"/>
           </a:p>
@@ -2050,7 +2050,7 @@
           <a:p>
             <a:fld id="{E9CC885B-4903-4D54-9A93-00025F12DED9}" type="datetimeFigureOut">
               <a:rPr kumimoji="1" lang="ja-JP" altLang="en-US" smtClean="0"/>
-              <a:t>2025/9/30</a:t>
+              <a:t>2025/10/31</a:t>
             </a:fld>
             <a:endParaRPr kumimoji="1" lang="ja-JP" altLang="en-US"/>
           </a:p>
@@ -2191,7 +2191,7 @@
           <a:p>
             <a:fld id="{E9CC885B-4903-4D54-9A93-00025F12DED9}" type="datetimeFigureOut">
               <a:rPr kumimoji="1" lang="ja-JP" altLang="en-US" smtClean="0"/>
-              <a:t>2025/9/30</a:t>
+              <a:t>2025/10/31</a:t>
             </a:fld>
             <a:endParaRPr kumimoji="1" lang="ja-JP" altLang="en-US"/>
           </a:p>
@@ -2304,7 +2304,7 @@
           <a:p>
             <a:fld id="{E9CC885B-4903-4D54-9A93-00025F12DED9}" type="datetimeFigureOut">
               <a:rPr kumimoji="1" lang="ja-JP" altLang="en-US" smtClean="0"/>
-              <a:t>2025/9/30</a:t>
+              <a:t>2025/10/31</a:t>
             </a:fld>
             <a:endParaRPr kumimoji="1" lang="ja-JP" altLang="en-US"/>
           </a:p>
@@ -2647,7 +2647,7 @@
           <a:p>
             <a:fld id="{E9CC885B-4903-4D54-9A93-00025F12DED9}" type="datetimeFigureOut">
               <a:rPr kumimoji="1" lang="ja-JP" altLang="en-US" smtClean="0"/>
-              <a:t>2025/9/30</a:t>
+              <a:t>2025/10/31</a:t>
             </a:fld>
             <a:endParaRPr kumimoji="1" lang="ja-JP" altLang="en-US"/>
           </a:p>
@@ -2935,7 +2935,7 @@
           <a:p>
             <a:fld id="{E9CC885B-4903-4D54-9A93-00025F12DED9}" type="datetimeFigureOut">
               <a:rPr kumimoji="1" lang="ja-JP" altLang="en-US" smtClean="0"/>
-              <a:t>2025/9/30</a:t>
+              <a:t>2025/10/31</a:t>
             </a:fld>
             <a:endParaRPr kumimoji="1" lang="ja-JP" altLang="en-US"/>
           </a:p>
@@ -3208,7 +3208,7 @@
           <a:p>
             <a:fld id="{E9CC885B-4903-4D54-9A93-00025F12DED9}" type="datetimeFigureOut">
               <a:rPr kumimoji="1" lang="ja-JP" altLang="en-US" smtClean="0"/>
-              <a:t>2025/9/30</a:t>
+              <a:t>2025/10/31</a:t>
             </a:fld>
             <a:endParaRPr kumimoji="1" lang="ja-JP" altLang="en-US"/>
           </a:p>
@@ -3967,56 +3967,6 @@
           </p:sp>
         </mc:Fallback>
       </mc:AlternateContent>
-      <p:sp>
-        <p:nvSpPr>
-          <p:cNvPr id="3" name="正方形/長方形 2">
-            <a:extLst>
-              <a:ext uri="{FF2B5EF4-FFF2-40B4-BE49-F238E27FC236}">
-                <a16:creationId xmlns:a16="http://schemas.microsoft.com/office/drawing/2014/main" id="{5D248159-D1DA-49E7-984D-40C755EC6B3D}"/>
-              </a:ext>
-            </a:extLst>
-          </p:cNvPr>
-          <p:cNvSpPr/>
-          <p:nvPr/>
-        </p:nvSpPr>
-        <p:spPr>
-          <a:xfrm>
-            <a:off x="2073612" y="4356848"/>
-            <a:ext cx="1174376" cy="1129553"/>
-          </a:xfrm>
-          <a:prstGeom prst="rect">
-            <a:avLst/>
-          </a:prstGeom>
-        </p:spPr>
-        <p:style>
-          <a:lnRef idx="2">
-            <a:schemeClr val="accent3">
-              <a:shade val="50000"/>
-            </a:schemeClr>
-          </a:lnRef>
-          <a:fillRef idx="1">
-            <a:schemeClr val="accent3"/>
-          </a:fillRef>
-          <a:effectRef idx="0">
-            <a:schemeClr val="accent3"/>
-          </a:effectRef>
-          <a:fontRef idx="minor">
-            <a:schemeClr val="lt1"/>
-          </a:fontRef>
-        </p:style>
-        <p:txBody>
-          <a:bodyPr rtlCol="0" anchor="ctr"/>
-          <a:lstStyle/>
-          <a:p>
-            <a:pPr algn="ctr"/>
-            <a:r>
-              <a:rPr kumimoji="1" lang="en-US" altLang="ja-JP" b="1" dirty="0"/>
-              <a:t>20kg</a:t>
-            </a:r>
-            <a:endParaRPr kumimoji="1" lang="ja-JP" altLang="en-US" b="1" dirty="0"/>
-          </a:p>
-        </p:txBody>
-      </p:sp>
       <mc:AlternateContent xmlns:mc="http://schemas.openxmlformats.org/markup-compatibility/2006" xmlns:a14="http://schemas.microsoft.com/office/drawing/2010/main">
         <mc:Choice Requires="a14">
           <p:sp>
@@ -4218,712 +4168,783 @@
           </p:sp>
         </mc:Fallback>
       </mc:AlternateContent>
-      <p:cxnSp>
-        <p:nvCxnSpPr>
-          <p:cNvPr id="11" name="直線矢印コネクタ 10">
+      <p:grpSp>
+        <p:nvGrpSpPr>
+          <p:cNvPr id="2" name="グループ化 1">
             <a:extLst>
               <a:ext uri="{FF2B5EF4-FFF2-40B4-BE49-F238E27FC236}">
-                <a16:creationId xmlns:a16="http://schemas.microsoft.com/office/drawing/2014/main" id="{E2AE73B5-EBF3-47A8-BFAA-6C3D70578B76}"/>
+                <a16:creationId xmlns:a16="http://schemas.microsoft.com/office/drawing/2014/main" id="{4237FE65-DF0F-4B00-BD2C-AE243A07B440}"/>
               </a:ext>
             </a:extLst>
           </p:cNvPr>
-          <p:cNvCxnSpPr>
-            <a:cxnSpLocks/>
-          </p:cNvCxnSpPr>
+          <p:cNvGrpSpPr/>
           <p:nvPr/>
-        </p:nvCxnSpPr>
-        <p:spPr>
+        </p:nvGrpSpPr>
+        <p:grpSpPr>
           <a:xfrm>
-            <a:off x="2605331" y="5486401"/>
-            <a:ext cx="0" cy="1118210"/>
+            <a:off x="825145" y="3466938"/>
+            <a:ext cx="4079787" cy="3137673"/>
+            <a:chOff x="825145" y="3466938"/>
+            <a:chExt cx="4079787" cy="3137673"/>
           </a:xfrm>
-          <a:prstGeom prst="straightConnector1">
-            <a:avLst/>
-          </a:prstGeom>
-          <a:ln w="38100">
-            <a:solidFill>
-              <a:srgbClr val="7030A0"/>
-            </a:solidFill>
-            <a:tailEnd type="triangle"/>
-          </a:ln>
-        </p:spPr>
-        <p:style>
-          <a:lnRef idx="1">
-            <a:schemeClr val="accent1"/>
-          </a:lnRef>
-          <a:fillRef idx="0">
-            <a:schemeClr val="accent1"/>
-          </a:fillRef>
-          <a:effectRef idx="0">
-            <a:schemeClr val="accent1"/>
-          </a:effectRef>
-          <a:fontRef idx="minor">
-            <a:schemeClr val="tx1"/>
-          </a:fontRef>
-        </p:style>
-      </p:cxnSp>
-      <mc:AlternateContent xmlns:mc="http://schemas.openxmlformats.org/markup-compatibility/2006" xmlns:a14="http://schemas.microsoft.com/office/drawing/2010/main">
-        <mc:Choice Requires="a14">
-          <p:sp>
-            <p:nvSpPr>
-              <p:cNvPr id="12" name="テキスト ボックス 11">
-                <a:extLst>
-                  <a:ext uri="{FF2B5EF4-FFF2-40B4-BE49-F238E27FC236}">
-                    <a16:creationId xmlns:a16="http://schemas.microsoft.com/office/drawing/2014/main" id="{5F9C7478-8BE7-40E1-AC23-D3482AE8FC24}"/>
-                  </a:ext>
-                </a:extLst>
-              </p:cNvPr>
-              <p:cNvSpPr txBox="1"/>
-              <p:nvPr/>
-            </p:nvSpPr>
-            <p:spPr>
-              <a:xfrm>
-                <a:off x="2660800" y="5860840"/>
-                <a:ext cx="1174376" cy="369332"/>
-              </a:xfrm>
-              <a:prstGeom prst="rect">
-                <a:avLst/>
-              </a:prstGeom>
-              <a:noFill/>
-            </p:spPr>
-            <p:txBody>
-              <a:bodyPr wrap="square">
-                <a:spAutoFit/>
-              </a:bodyPr>
-              <a:lstStyle/>
-              <a:p>
-                <a14:m>
-                  <m:oMath xmlns:m="http://schemas.openxmlformats.org/officeDocument/2006/math">
-                    <m:r>
-                      <a:rPr lang="en-US" altLang="ja-JP" sz="1800" i="1" smtClean="0">
-                        <a:solidFill>
-                          <a:srgbClr val="7030A0"/>
-                        </a:solidFill>
-                        <a:latin typeface="Cambria Math" panose="02040503050406030204" pitchFamily="18" charset="0"/>
-                      </a:rPr>
-                      <m:t>[0, </m:t>
-                    </m:r>
-                    <m:r>
-                      <a:rPr lang="en-US" altLang="ja-JP" sz="1800" b="0" i="1" smtClean="0">
-                        <a:solidFill>
-                          <a:srgbClr val="7030A0"/>
-                        </a:solidFill>
-                        <a:latin typeface="Cambria Math" panose="02040503050406030204" pitchFamily="18" charset="0"/>
-                      </a:rPr>
-                      <m:t>−</m:t>
-                    </m:r>
-                    <m:r>
-                      <a:rPr lang="en-US" altLang="ja-JP" sz="1800" i="1" smtClean="0">
-                        <a:solidFill>
-                          <a:srgbClr val="7030A0"/>
-                        </a:solidFill>
-                        <a:latin typeface="Cambria Math" panose="02040503050406030204" pitchFamily="18" charset="0"/>
-                      </a:rPr>
-                      <m:t>196</m:t>
-                    </m:r>
-                    <m:r>
-                      <a:rPr lang="en-US" altLang="ja-JP" sz="1800" i="1" smtClean="0">
-                        <a:solidFill>
-                          <a:srgbClr val="7030A0"/>
-                        </a:solidFill>
-                        <a:latin typeface="Cambria Math" panose="02040503050406030204" pitchFamily="18" charset="0"/>
-                      </a:rPr>
-                      <m:t>𝑁</m:t>
-                    </m:r>
-                    <m:r>
-                      <a:rPr lang="en-US" altLang="ja-JP" sz="1800" i="1" smtClean="0">
-                        <a:solidFill>
-                          <a:srgbClr val="7030A0"/>
-                        </a:solidFill>
-                        <a:latin typeface="Cambria Math" panose="02040503050406030204" pitchFamily="18" charset="0"/>
-                      </a:rPr>
-                      <m:t>]</m:t>
-                    </m:r>
-                  </m:oMath>
-                </a14:m>
-                <a:r>
-                  <a:rPr lang="en-US" altLang="ja-JP" sz="1800" dirty="0">
-                    <a:solidFill>
-                      <a:srgbClr val="7030A0"/>
-                    </a:solidFill>
-                  </a:rPr>
-                  <a:t> </a:t>
-                </a:r>
-              </a:p>
-            </p:txBody>
-          </p:sp>
-        </mc:Choice>
-        <mc:Fallback xmlns="">
-          <p:sp>
-            <p:nvSpPr>
-              <p:cNvPr id="12" name="テキスト ボックス 11">
-                <a:extLst>
-                  <a:ext uri="{FF2B5EF4-FFF2-40B4-BE49-F238E27FC236}">
-                    <a16:creationId xmlns:a16="http://schemas.microsoft.com/office/drawing/2014/main" id="{5F9C7478-8BE7-40E1-AC23-D3482AE8FC24}"/>
-                  </a:ext>
-                </a:extLst>
-              </p:cNvPr>
-              <p:cNvSpPr txBox="1">
-                <a:spLocks noRot="1" noChangeAspect="1" noMove="1" noResize="1" noEditPoints="1" noAdjustHandles="1" noChangeArrowheads="1" noChangeShapeType="1" noTextEdit="1"/>
-              </p:cNvSpPr>
-              <p:nvPr/>
-            </p:nvSpPr>
-            <p:spPr>
-              <a:xfrm>
-                <a:off x="2660800" y="5860840"/>
-                <a:ext cx="1174376" cy="369332"/>
-              </a:xfrm>
-              <a:prstGeom prst="rect">
-                <a:avLst/>
-              </a:prstGeom>
-              <a:blipFill>
-                <a:blip r:embed="rId4"/>
-                <a:stretch>
-                  <a:fillRect l="-1554" r="-10881" b="-14754"/>
-                </a:stretch>
-              </a:blipFill>
-            </p:spPr>
-            <p:txBody>
-              <a:bodyPr/>
-              <a:lstStyle/>
-              <a:p>
-                <a:r>
-                  <a:rPr lang="ja-JP" altLang="en-US">
-                    <a:noFill/>
-                  </a:rPr>
-                  <a:t> </a:t>
-                </a:r>
-              </a:p>
-            </p:txBody>
-          </p:sp>
-        </mc:Fallback>
-      </mc:AlternateContent>
-      <p:cxnSp>
-        <p:nvCxnSpPr>
-          <p:cNvPr id="5" name="直線矢印コネクタ 4">
-            <a:extLst>
-              <a:ext uri="{FF2B5EF4-FFF2-40B4-BE49-F238E27FC236}">
-                <a16:creationId xmlns:a16="http://schemas.microsoft.com/office/drawing/2014/main" id="{CA53EC50-58D3-40C5-8C2F-BABEE5FA8DD1}"/>
-              </a:ext>
-            </a:extLst>
-          </p:cNvPr>
-          <p:cNvCxnSpPr/>
-          <p:nvPr/>
-        </p:nvCxnSpPr>
-        <p:spPr>
-          <a:xfrm flipV="1">
-            <a:off x="3247988" y="3466938"/>
-            <a:ext cx="880259" cy="1030942"/>
-          </a:xfrm>
-          <a:prstGeom prst="straightConnector1">
-            <a:avLst/>
-          </a:prstGeom>
-          <a:ln w="38100">
-            <a:solidFill>
-              <a:srgbClr val="FFC000"/>
-            </a:solidFill>
-            <a:tailEnd type="triangle"/>
-          </a:ln>
-        </p:spPr>
-        <p:style>
-          <a:lnRef idx="1">
-            <a:schemeClr val="accent1"/>
-          </a:lnRef>
-          <a:fillRef idx="0">
-            <a:schemeClr val="accent1"/>
-          </a:fillRef>
-          <a:effectRef idx="0">
-            <a:schemeClr val="accent1"/>
-          </a:effectRef>
-          <a:fontRef idx="minor">
-            <a:schemeClr val="tx1"/>
-          </a:fontRef>
-        </p:style>
-      </p:cxnSp>
-      <mc:AlternateContent xmlns:mc="http://schemas.openxmlformats.org/markup-compatibility/2006" xmlns:a14="http://schemas.microsoft.com/office/drawing/2010/main">
-        <mc:Choice Requires="a14">
-          <p:sp>
-            <p:nvSpPr>
-              <p:cNvPr id="13" name="テキスト ボックス 12">
-                <a:extLst>
-                  <a:ext uri="{FF2B5EF4-FFF2-40B4-BE49-F238E27FC236}">
-                    <a16:creationId xmlns:a16="http://schemas.microsoft.com/office/drawing/2014/main" id="{E26530F0-EA8A-4C50-8CC5-5C124E0DF2CF}"/>
-                  </a:ext>
-                </a:extLst>
-              </p:cNvPr>
-              <p:cNvSpPr txBox="1"/>
-              <p:nvPr/>
-            </p:nvSpPr>
-            <p:spPr>
-              <a:xfrm>
-                <a:off x="1242010" y="4071911"/>
-                <a:ext cx="6096000" cy="369332"/>
-              </a:xfrm>
-              <a:prstGeom prst="rect">
-                <a:avLst/>
-              </a:prstGeom>
-              <a:noFill/>
-            </p:spPr>
-            <p:txBody>
-              <a:bodyPr wrap="square">
-                <a:spAutoFit/>
-              </a:bodyPr>
-              <a:lstStyle/>
-              <a:p>
-                <a:pPr/>
-                <a14:m>
-                  <m:oMathPara xmlns:m="http://schemas.openxmlformats.org/officeDocument/2006/math">
-                    <m:oMathParaPr>
-                      <m:jc m:val="centerGroup"/>
-                    </m:oMathParaPr>
+        </p:grpSpPr>
+        <p:sp>
+          <p:nvSpPr>
+            <p:cNvPr id="3" name="正方形/長方形 2">
+              <a:extLst>
+                <a:ext uri="{FF2B5EF4-FFF2-40B4-BE49-F238E27FC236}">
+                  <a16:creationId xmlns:a16="http://schemas.microsoft.com/office/drawing/2014/main" id="{5D248159-D1DA-49E7-984D-40C755EC6B3D}"/>
+                </a:ext>
+              </a:extLst>
+            </p:cNvPr>
+            <p:cNvSpPr/>
+            <p:nvPr/>
+          </p:nvSpPr>
+          <p:spPr>
+            <a:xfrm>
+              <a:off x="2073612" y="4356848"/>
+              <a:ext cx="1174376" cy="1129553"/>
+            </a:xfrm>
+            <a:prstGeom prst="rect">
+              <a:avLst/>
+            </a:prstGeom>
+          </p:spPr>
+          <p:style>
+            <a:lnRef idx="2">
+              <a:schemeClr val="accent3">
+                <a:shade val="50000"/>
+              </a:schemeClr>
+            </a:lnRef>
+            <a:fillRef idx="1">
+              <a:schemeClr val="accent3"/>
+            </a:fillRef>
+            <a:effectRef idx="0">
+              <a:schemeClr val="accent3"/>
+            </a:effectRef>
+            <a:fontRef idx="minor">
+              <a:schemeClr val="lt1"/>
+            </a:fontRef>
+          </p:style>
+          <p:txBody>
+            <a:bodyPr rtlCol="0" anchor="ctr"/>
+            <a:lstStyle/>
+            <a:p>
+              <a:pPr algn="ctr"/>
+              <a:r>
+                <a:rPr kumimoji="1" lang="en-US" altLang="ja-JP" b="1" dirty="0"/>
+                <a:t>20kg</a:t>
+              </a:r>
+              <a:endParaRPr kumimoji="1" lang="ja-JP" altLang="en-US" b="1" dirty="0"/>
+            </a:p>
+          </p:txBody>
+        </p:sp>
+        <p:cxnSp>
+          <p:nvCxnSpPr>
+            <p:cNvPr id="11" name="直線矢印コネクタ 10">
+              <a:extLst>
+                <a:ext uri="{FF2B5EF4-FFF2-40B4-BE49-F238E27FC236}">
+                  <a16:creationId xmlns:a16="http://schemas.microsoft.com/office/drawing/2014/main" id="{E2AE73B5-EBF3-47A8-BFAA-6C3D70578B76}"/>
+                </a:ext>
+              </a:extLst>
+            </p:cNvPr>
+            <p:cNvCxnSpPr>
+              <a:cxnSpLocks/>
+            </p:cNvCxnSpPr>
+            <p:nvPr/>
+          </p:nvCxnSpPr>
+          <p:spPr>
+            <a:xfrm>
+              <a:off x="2605331" y="5486401"/>
+              <a:ext cx="0" cy="1118210"/>
+            </a:xfrm>
+            <a:prstGeom prst="straightConnector1">
+              <a:avLst/>
+            </a:prstGeom>
+            <a:ln w="38100">
+              <a:solidFill>
+                <a:srgbClr val="7030A0"/>
+              </a:solidFill>
+              <a:tailEnd type="triangle"/>
+            </a:ln>
+          </p:spPr>
+          <p:style>
+            <a:lnRef idx="1">
+              <a:schemeClr val="accent1"/>
+            </a:lnRef>
+            <a:fillRef idx="0">
+              <a:schemeClr val="accent1"/>
+            </a:fillRef>
+            <a:effectRef idx="0">
+              <a:schemeClr val="accent1"/>
+            </a:effectRef>
+            <a:fontRef idx="minor">
+              <a:schemeClr val="tx1"/>
+            </a:fontRef>
+          </p:style>
+        </p:cxnSp>
+        <mc:AlternateContent xmlns:mc="http://schemas.openxmlformats.org/markup-compatibility/2006">
+          <mc:Choice xmlns:a14="http://schemas.microsoft.com/office/drawing/2010/main" Requires="a14">
+            <p:sp>
+              <p:nvSpPr>
+                <p:cNvPr id="12" name="テキスト ボックス 11">
+                  <a:extLst>
+                    <a:ext uri="{FF2B5EF4-FFF2-40B4-BE49-F238E27FC236}">
+                      <a16:creationId xmlns:a16="http://schemas.microsoft.com/office/drawing/2014/main" id="{5F9C7478-8BE7-40E1-AC23-D3482AE8FC24}"/>
+                    </a:ext>
+                  </a:extLst>
+                </p:cNvPr>
+                <p:cNvSpPr txBox="1"/>
+                <p:nvPr/>
+              </p:nvSpPr>
+              <p:spPr>
+                <a:xfrm>
+                  <a:off x="2660800" y="5860840"/>
+                  <a:ext cx="1174376" cy="369332"/>
+                </a:xfrm>
+                <a:prstGeom prst="rect">
+                  <a:avLst/>
+                </a:prstGeom>
+                <a:noFill/>
+              </p:spPr>
+              <p:txBody>
+                <a:bodyPr wrap="square">
+                  <a:spAutoFit/>
+                </a:bodyPr>
+                <a:lstStyle/>
+                <a:p>
+                  <a14:m>
                     <m:oMath xmlns:m="http://schemas.openxmlformats.org/officeDocument/2006/math">
                       <m:r>
                         <a:rPr lang="en-US" altLang="ja-JP" sz="1800" i="1" smtClean="0">
                           <a:solidFill>
-                            <a:srgbClr val="FFC000"/>
+                            <a:srgbClr val="7030A0"/>
                           </a:solidFill>
                           <a:latin typeface="Cambria Math" panose="02040503050406030204" pitchFamily="18" charset="0"/>
                         </a:rPr>
-                        <m:t>[</m:t>
+                        <m:t>[0, </m:t>
                       </m:r>
                       <m:r>
                         <a:rPr lang="en-US" altLang="ja-JP" sz="1800" b="0" i="1" smtClean="0">
                           <a:solidFill>
-                            <a:srgbClr val="FFC000"/>
+                            <a:srgbClr val="7030A0"/>
                           </a:solidFill>
                           <a:latin typeface="Cambria Math" panose="02040503050406030204" pitchFamily="18" charset="0"/>
                         </a:rPr>
-                        <m:t>50</m:t>
+                        <m:t>−</m:t>
                       </m:r>
                       <m:r>
-                        <a:rPr lang="en-US" altLang="ja-JP" sz="1800" b="0" i="1" smtClean="0">
+                        <a:rPr lang="en-US" altLang="ja-JP" sz="1800" i="1" smtClean="0">
                           <a:solidFill>
-                            <a:srgbClr val="FFC000"/>
+                            <a:srgbClr val="7030A0"/>
+                          </a:solidFill>
+                          <a:latin typeface="Cambria Math" panose="02040503050406030204" pitchFamily="18" charset="0"/>
+                        </a:rPr>
+                        <m:t>196</m:t>
+                      </m:r>
+                      <m:r>
+                        <a:rPr lang="en-US" altLang="ja-JP" sz="1800" i="1" smtClean="0">
+                          <a:solidFill>
+                            <a:srgbClr val="7030A0"/>
                           </a:solidFill>
                           <a:latin typeface="Cambria Math" panose="02040503050406030204" pitchFamily="18" charset="0"/>
                         </a:rPr>
                         <m:t>𝑁</m:t>
                       </m:r>
                       <m:r>
-                        <a:rPr lang="en-US" altLang="ja-JP" sz="1800" b="0" i="1" smtClean="0">
+                        <a:rPr lang="en-US" altLang="ja-JP" sz="1800" i="1" smtClean="0">
                           <a:solidFill>
-                            <a:srgbClr val="FFC000"/>
+                            <a:srgbClr val="7030A0"/>
                           </a:solidFill>
                           <a:latin typeface="Cambria Math" panose="02040503050406030204" pitchFamily="18" charset="0"/>
                         </a:rPr>
-                        <m:t>,86</m:t>
+                        <m:t>]</m:t>
+                      </m:r>
+                    </m:oMath>
+                  </a14:m>
+                  <a:r>
+                    <a:rPr lang="en-US" altLang="ja-JP" sz="1800" dirty="0">
+                      <a:solidFill>
+                        <a:srgbClr val="7030A0"/>
+                      </a:solidFill>
+                    </a:rPr>
+                    <a:t> </a:t>
+                  </a:r>
+                </a:p>
+              </p:txBody>
+            </p:sp>
+          </mc:Choice>
+          <mc:Fallback>
+            <p:sp>
+              <p:nvSpPr>
+                <p:cNvPr id="12" name="テキスト ボックス 11">
+                  <a:extLst>
+                    <a:ext uri="{FF2B5EF4-FFF2-40B4-BE49-F238E27FC236}">
+                      <a16:creationId xmlns:a16="http://schemas.microsoft.com/office/drawing/2014/main" id="{5F9C7478-8BE7-40E1-AC23-D3482AE8FC24}"/>
+                    </a:ext>
+                  </a:extLst>
+                </p:cNvPr>
+                <p:cNvSpPr txBox="1">
+                  <a:spLocks noRot="1" noChangeAspect="1" noMove="1" noResize="1" noEditPoints="1" noAdjustHandles="1" noChangeArrowheads="1" noChangeShapeType="1" noTextEdit="1"/>
+                </p:cNvSpPr>
+                <p:nvPr/>
+              </p:nvSpPr>
+              <p:spPr>
+                <a:xfrm>
+                  <a:off x="2660800" y="5860840"/>
+                  <a:ext cx="1174376" cy="369332"/>
+                </a:xfrm>
+                <a:prstGeom prst="rect">
+                  <a:avLst/>
+                </a:prstGeom>
+                <a:blipFill>
+                  <a:blip r:embed="rId4"/>
+                  <a:stretch>
+                    <a:fillRect l="-1554" r="-10881" b="-14754"/>
+                  </a:stretch>
+                </a:blipFill>
+              </p:spPr>
+              <p:txBody>
+                <a:bodyPr/>
+                <a:lstStyle/>
+                <a:p>
+                  <a:r>
+                    <a:rPr lang="ja-JP" altLang="en-US">
+                      <a:noFill/>
+                    </a:rPr>
+                    <a:t> </a:t>
+                  </a:r>
+                </a:p>
+              </p:txBody>
+            </p:sp>
+          </mc:Fallback>
+        </mc:AlternateContent>
+        <p:cxnSp>
+          <p:nvCxnSpPr>
+            <p:cNvPr id="5" name="直線矢印コネクタ 4">
+              <a:extLst>
+                <a:ext uri="{FF2B5EF4-FFF2-40B4-BE49-F238E27FC236}">
+                  <a16:creationId xmlns:a16="http://schemas.microsoft.com/office/drawing/2014/main" id="{CA53EC50-58D3-40C5-8C2F-BABEE5FA8DD1}"/>
+                </a:ext>
+              </a:extLst>
+            </p:cNvPr>
+            <p:cNvCxnSpPr/>
+            <p:nvPr/>
+          </p:nvCxnSpPr>
+          <p:spPr>
+            <a:xfrm flipV="1">
+              <a:off x="3247988" y="3466938"/>
+              <a:ext cx="880259" cy="1030942"/>
+            </a:xfrm>
+            <a:prstGeom prst="straightConnector1">
+              <a:avLst/>
+            </a:prstGeom>
+            <a:ln w="38100">
+              <a:solidFill>
+                <a:srgbClr val="FFC000"/>
+              </a:solidFill>
+              <a:tailEnd type="triangle"/>
+            </a:ln>
+          </p:spPr>
+          <p:style>
+            <a:lnRef idx="1">
+              <a:schemeClr val="accent1"/>
+            </a:lnRef>
+            <a:fillRef idx="0">
+              <a:schemeClr val="accent1"/>
+            </a:fillRef>
+            <a:effectRef idx="0">
+              <a:schemeClr val="accent1"/>
+            </a:effectRef>
+            <a:fontRef idx="minor">
+              <a:schemeClr val="tx1"/>
+            </a:fontRef>
+          </p:style>
+        </p:cxnSp>
+        <mc:AlternateContent xmlns:mc="http://schemas.openxmlformats.org/markup-compatibility/2006">
+          <mc:Choice xmlns:a14="http://schemas.microsoft.com/office/drawing/2010/main" Requires="a14">
+            <p:sp>
+              <p:nvSpPr>
+                <p:cNvPr id="13" name="テキスト ボックス 12">
+                  <a:extLst>
+                    <a:ext uri="{FF2B5EF4-FFF2-40B4-BE49-F238E27FC236}">
+                      <a16:creationId xmlns:a16="http://schemas.microsoft.com/office/drawing/2014/main" id="{E26530F0-EA8A-4C50-8CC5-5C124E0DF2CF}"/>
+                    </a:ext>
+                  </a:extLst>
+                </p:cNvPr>
+                <p:cNvSpPr txBox="1"/>
+                <p:nvPr/>
+              </p:nvSpPr>
+              <p:spPr>
+                <a:xfrm>
+                  <a:off x="3636241" y="4128548"/>
+                  <a:ext cx="1268691" cy="369332"/>
+                </a:xfrm>
+                <a:prstGeom prst="rect">
+                  <a:avLst/>
+                </a:prstGeom>
+                <a:noFill/>
+              </p:spPr>
+              <p:txBody>
+                <a:bodyPr wrap="square">
+                  <a:spAutoFit/>
+                </a:bodyPr>
+                <a:lstStyle/>
+                <a:p>
+                  <a:pPr/>
+                  <a14:m>
+                    <m:oMathPara xmlns:m="http://schemas.openxmlformats.org/officeDocument/2006/math">
+                      <m:oMathParaPr>
+                        <m:jc m:val="centerGroup"/>
+                      </m:oMathParaPr>
+                      <m:oMath xmlns:m="http://schemas.openxmlformats.org/officeDocument/2006/math">
+                        <m:r>
+                          <a:rPr lang="en-US" altLang="ja-JP" sz="1800" i="1" smtClean="0">
+                            <a:solidFill>
+                              <a:srgbClr val="FFC000"/>
+                            </a:solidFill>
+                            <a:latin typeface="Cambria Math" panose="02040503050406030204" pitchFamily="18" charset="0"/>
+                          </a:rPr>
+                          <m:t>[</m:t>
+                        </m:r>
+                        <m:r>
+                          <a:rPr lang="en-US" altLang="ja-JP" sz="1800" b="0" i="1" smtClean="0">
+                            <a:solidFill>
+                              <a:srgbClr val="FFC000"/>
+                            </a:solidFill>
+                            <a:latin typeface="Cambria Math" panose="02040503050406030204" pitchFamily="18" charset="0"/>
+                          </a:rPr>
+                          <m:t>50</m:t>
+                        </m:r>
+                        <m:r>
+                          <a:rPr lang="en-US" altLang="ja-JP" sz="1800" b="0" i="1" smtClean="0">
+                            <a:solidFill>
+                              <a:srgbClr val="FFC000"/>
+                            </a:solidFill>
+                            <a:latin typeface="Cambria Math" panose="02040503050406030204" pitchFamily="18" charset="0"/>
+                          </a:rPr>
+                          <m:t>𝑁</m:t>
+                        </m:r>
+                        <m:r>
+                          <a:rPr lang="en-US" altLang="ja-JP" sz="1800" b="0" i="1" smtClean="0">
+                            <a:solidFill>
+                              <a:srgbClr val="FFC000"/>
+                            </a:solidFill>
+                            <a:latin typeface="Cambria Math" panose="02040503050406030204" pitchFamily="18" charset="0"/>
+                          </a:rPr>
+                          <m:t>,86</m:t>
+                        </m:r>
+                        <m:r>
+                          <a:rPr lang="en-US" altLang="ja-JP" sz="1800" b="0" i="1" smtClean="0">
+                            <a:solidFill>
+                              <a:srgbClr val="FFC000"/>
+                            </a:solidFill>
+                            <a:latin typeface="Cambria Math" panose="02040503050406030204" pitchFamily="18" charset="0"/>
+                          </a:rPr>
+                          <m:t>𝑁</m:t>
+                        </m:r>
+                        <m:r>
+                          <a:rPr lang="en-US" altLang="ja-JP" sz="1800" i="1">
+                            <a:solidFill>
+                              <a:srgbClr val="FFC000"/>
+                            </a:solidFill>
+                            <a:latin typeface="Cambria Math" panose="02040503050406030204" pitchFamily="18" charset="0"/>
+                          </a:rPr>
+                          <m:t>]</m:t>
+                        </m:r>
+                      </m:oMath>
+                    </m:oMathPara>
+                  </a14:m>
+                  <a:endParaRPr lang="ja-JP" altLang="en-US" dirty="0">
+                    <a:solidFill>
+                      <a:srgbClr val="FFC000"/>
+                    </a:solidFill>
+                  </a:endParaRPr>
+                </a:p>
+              </p:txBody>
+            </p:sp>
+          </mc:Choice>
+          <mc:Fallback>
+            <p:sp>
+              <p:nvSpPr>
+                <p:cNvPr id="13" name="テキスト ボックス 12">
+                  <a:extLst>
+                    <a:ext uri="{FF2B5EF4-FFF2-40B4-BE49-F238E27FC236}">
+                      <a16:creationId xmlns:a16="http://schemas.microsoft.com/office/drawing/2014/main" id="{E26530F0-EA8A-4C50-8CC5-5C124E0DF2CF}"/>
+                    </a:ext>
+                  </a:extLst>
+                </p:cNvPr>
+                <p:cNvSpPr txBox="1">
+                  <a:spLocks noRot="1" noChangeAspect="1" noMove="1" noResize="1" noEditPoints="1" noAdjustHandles="1" noChangeArrowheads="1" noChangeShapeType="1" noTextEdit="1"/>
+                </p:cNvSpPr>
+                <p:nvPr/>
+              </p:nvSpPr>
+              <p:spPr>
+                <a:xfrm>
+                  <a:off x="3636241" y="4128548"/>
+                  <a:ext cx="1268691" cy="369332"/>
+                </a:xfrm>
+                <a:prstGeom prst="rect">
+                  <a:avLst/>
+                </a:prstGeom>
+                <a:blipFill>
+                  <a:blip r:embed="rId5"/>
+                  <a:stretch>
+                    <a:fillRect l="-1435" r="-2392" b="-14754"/>
+                  </a:stretch>
+                </a:blipFill>
+              </p:spPr>
+              <p:txBody>
+                <a:bodyPr/>
+                <a:lstStyle/>
+                <a:p>
+                  <a:r>
+                    <a:rPr lang="ja-JP" altLang="en-US">
+                      <a:noFill/>
+                    </a:rPr>
+                    <a:t> </a:t>
+                  </a:r>
+                </a:p>
+              </p:txBody>
+            </p:sp>
+          </mc:Fallback>
+        </mc:AlternateContent>
+        <p:cxnSp>
+          <p:nvCxnSpPr>
+            <p:cNvPr id="10" name="直線矢印コネクタ 9">
+              <a:extLst>
+                <a:ext uri="{FF2B5EF4-FFF2-40B4-BE49-F238E27FC236}">
+                  <a16:creationId xmlns:a16="http://schemas.microsoft.com/office/drawing/2014/main" id="{8B65E137-FF19-45DC-B8AB-48CF040F4DA9}"/>
+                </a:ext>
+              </a:extLst>
+            </p:cNvPr>
+            <p:cNvCxnSpPr>
+              <a:cxnSpLocks/>
+            </p:cNvCxnSpPr>
+            <p:nvPr/>
+          </p:nvCxnSpPr>
+          <p:spPr>
+            <a:xfrm flipV="1">
+              <a:off x="2605331" y="3466938"/>
+              <a:ext cx="0" cy="889911"/>
+            </a:xfrm>
+            <a:prstGeom prst="straightConnector1">
+              <a:avLst/>
+            </a:prstGeom>
+            <a:ln w="38100">
+              <a:solidFill>
+                <a:srgbClr val="00B050"/>
+              </a:solidFill>
+              <a:tailEnd type="triangle"/>
+            </a:ln>
+          </p:spPr>
+          <p:style>
+            <a:lnRef idx="1">
+              <a:schemeClr val="accent1"/>
+            </a:lnRef>
+            <a:fillRef idx="0">
+              <a:schemeClr val="accent1"/>
+            </a:fillRef>
+            <a:effectRef idx="0">
+              <a:schemeClr val="accent1"/>
+            </a:effectRef>
+            <a:fontRef idx="minor">
+              <a:schemeClr val="tx1"/>
+            </a:fontRef>
+          </p:style>
+        </p:cxnSp>
+        <mc:AlternateContent xmlns:mc="http://schemas.openxmlformats.org/markup-compatibility/2006">
+          <mc:Choice xmlns:a14="http://schemas.microsoft.com/office/drawing/2010/main" Requires="a14">
+            <p:sp>
+              <p:nvSpPr>
+                <p:cNvPr id="14" name="テキスト ボックス 13">
+                  <a:extLst>
+                    <a:ext uri="{FF2B5EF4-FFF2-40B4-BE49-F238E27FC236}">
+                      <a16:creationId xmlns:a16="http://schemas.microsoft.com/office/drawing/2014/main" id="{A59F2E55-2B4C-4A9E-B022-0FA7810E8D75}"/>
+                    </a:ext>
+                  </a:extLst>
+                </p:cNvPr>
+                <p:cNvSpPr txBox="1"/>
+                <p:nvPr/>
+              </p:nvSpPr>
+              <p:spPr>
+                <a:xfrm>
+                  <a:off x="1486424" y="3772688"/>
+                  <a:ext cx="1174376" cy="369332"/>
+                </a:xfrm>
+                <a:prstGeom prst="rect">
+                  <a:avLst/>
+                </a:prstGeom>
+                <a:noFill/>
+              </p:spPr>
+              <p:txBody>
+                <a:bodyPr wrap="square">
+                  <a:spAutoFit/>
+                </a:bodyPr>
+                <a:lstStyle/>
+                <a:p>
+                  <a14:m>
+                    <m:oMath xmlns:m="http://schemas.openxmlformats.org/officeDocument/2006/math">
+                      <m:r>
+                        <a:rPr lang="en-US" altLang="ja-JP" sz="1800" i="1" smtClean="0">
+                          <a:solidFill>
+                            <a:srgbClr val="00B050"/>
+                          </a:solidFill>
+                          <a:latin typeface="Cambria Math" panose="02040503050406030204" pitchFamily="18" charset="0"/>
+                        </a:rPr>
+                        <m:t>[0, </m:t>
                       </m:r>
                       <m:r>
                         <a:rPr lang="en-US" altLang="ja-JP" sz="1800" b="0" i="1" smtClean="0">
                           <a:solidFill>
-                            <a:srgbClr val="FFC000"/>
+                            <a:srgbClr val="00B050"/>
+                          </a:solidFill>
+                          <a:latin typeface="Cambria Math" panose="02040503050406030204" pitchFamily="18" charset="0"/>
+                        </a:rPr>
+                        <m:t>110</m:t>
+                      </m:r>
+                      <m:r>
+                        <a:rPr lang="en-US" altLang="ja-JP" sz="1800" i="1" smtClean="0">
+                          <a:solidFill>
+                            <a:srgbClr val="00B050"/>
                           </a:solidFill>
                           <a:latin typeface="Cambria Math" panose="02040503050406030204" pitchFamily="18" charset="0"/>
                         </a:rPr>
                         <m:t>𝑁</m:t>
                       </m:r>
                       <m:r>
-                        <a:rPr lang="en-US" altLang="ja-JP" sz="1800" i="1">
+                        <a:rPr lang="en-US" altLang="ja-JP" sz="1800" i="1" smtClean="0">
                           <a:solidFill>
-                            <a:srgbClr val="FFC000"/>
+                            <a:srgbClr val="00B050"/>
                           </a:solidFill>
                           <a:latin typeface="Cambria Math" panose="02040503050406030204" pitchFamily="18" charset="0"/>
                         </a:rPr>
                         <m:t>]</m:t>
                       </m:r>
                     </m:oMath>
-                  </m:oMathPara>
-                </a14:m>
-                <a:endParaRPr lang="ja-JP" altLang="en-US" dirty="0">
-                  <a:solidFill>
-                    <a:srgbClr val="FFC000"/>
-                  </a:solidFill>
-                </a:endParaRPr>
-              </a:p>
-            </p:txBody>
-          </p:sp>
-        </mc:Choice>
-        <mc:Fallback xmlns="">
-          <p:sp>
-            <p:nvSpPr>
-              <p:cNvPr id="13" name="テキスト ボックス 12">
-                <a:extLst>
-                  <a:ext uri="{FF2B5EF4-FFF2-40B4-BE49-F238E27FC236}">
-                    <a16:creationId xmlns:a16="http://schemas.microsoft.com/office/drawing/2014/main" id="{E26530F0-EA8A-4C50-8CC5-5C124E0DF2CF}"/>
-                  </a:ext>
-                </a:extLst>
-              </p:cNvPr>
-              <p:cNvSpPr txBox="1">
-                <a:spLocks noRot="1" noChangeAspect="1" noMove="1" noResize="1" noEditPoints="1" noAdjustHandles="1" noChangeArrowheads="1" noChangeShapeType="1" noTextEdit="1"/>
-              </p:cNvSpPr>
-              <p:nvPr/>
-            </p:nvSpPr>
-            <p:spPr>
-              <a:xfrm>
-                <a:off x="1242010" y="4071911"/>
-                <a:ext cx="6096000" cy="369332"/>
-              </a:xfrm>
-              <a:prstGeom prst="rect">
-                <a:avLst/>
-              </a:prstGeom>
-              <a:blipFill>
-                <a:blip r:embed="rId5"/>
-                <a:stretch>
-                  <a:fillRect b="-14754"/>
-                </a:stretch>
-              </a:blipFill>
-            </p:spPr>
-            <p:txBody>
-              <a:bodyPr/>
-              <a:lstStyle/>
-              <a:p>
-                <a:r>
-                  <a:rPr lang="ja-JP" altLang="en-US">
-                    <a:noFill/>
-                  </a:rPr>
-                  <a:t> </a:t>
-                </a:r>
-              </a:p>
-            </p:txBody>
-          </p:sp>
-        </mc:Fallback>
-      </mc:AlternateContent>
-      <p:cxnSp>
-        <p:nvCxnSpPr>
-          <p:cNvPr id="10" name="直線矢印コネクタ 9">
-            <a:extLst>
-              <a:ext uri="{FF2B5EF4-FFF2-40B4-BE49-F238E27FC236}">
-                <a16:creationId xmlns:a16="http://schemas.microsoft.com/office/drawing/2014/main" id="{8B65E137-FF19-45DC-B8AB-48CF040F4DA9}"/>
-              </a:ext>
-            </a:extLst>
-          </p:cNvPr>
-          <p:cNvCxnSpPr>
-            <a:cxnSpLocks/>
-          </p:cNvCxnSpPr>
-          <p:nvPr/>
-        </p:nvCxnSpPr>
-        <p:spPr>
-          <a:xfrm flipV="1">
-            <a:off x="2605331" y="3466938"/>
-            <a:ext cx="0" cy="889911"/>
-          </a:xfrm>
-          <a:prstGeom prst="straightConnector1">
-            <a:avLst/>
-          </a:prstGeom>
-          <a:ln w="38100">
-            <a:solidFill>
-              <a:srgbClr val="00B050"/>
-            </a:solidFill>
-            <a:tailEnd type="triangle"/>
-          </a:ln>
-        </p:spPr>
-        <p:style>
-          <a:lnRef idx="1">
-            <a:schemeClr val="accent1"/>
-          </a:lnRef>
-          <a:fillRef idx="0">
-            <a:schemeClr val="accent1"/>
-          </a:fillRef>
-          <a:effectRef idx="0">
-            <a:schemeClr val="accent1"/>
-          </a:effectRef>
-          <a:fontRef idx="minor">
-            <a:schemeClr val="tx1"/>
-          </a:fontRef>
-        </p:style>
-      </p:cxnSp>
-      <mc:AlternateContent xmlns:mc="http://schemas.openxmlformats.org/markup-compatibility/2006" xmlns:a14="http://schemas.microsoft.com/office/drawing/2010/main">
-        <mc:Choice Requires="a14">
-          <p:sp>
-            <p:nvSpPr>
-              <p:cNvPr id="14" name="テキスト ボックス 13">
-                <a:extLst>
-                  <a:ext uri="{FF2B5EF4-FFF2-40B4-BE49-F238E27FC236}">
-                    <a16:creationId xmlns:a16="http://schemas.microsoft.com/office/drawing/2014/main" id="{A59F2E55-2B4C-4A9E-B022-0FA7810E8D75}"/>
-                  </a:ext>
-                </a:extLst>
-              </p:cNvPr>
-              <p:cNvSpPr txBox="1"/>
-              <p:nvPr/>
-            </p:nvSpPr>
-            <p:spPr>
-              <a:xfrm>
-                <a:off x="1486424" y="3772688"/>
-                <a:ext cx="1174376" cy="369332"/>
-              </a:xfrm>
-              <a:prstGeom prst="rect">
-                <a:avLst/>
-              </a:prstGeom>
-              <a:noFill/>
-            </p:spPr>
-            <p:txBody>
-              <a:bodyPr wrap="square">
-                <a:spAutoFit/>
-              </a:bodyPr>
-              <a:lstStyle/>
-              <a:p>
-                <a14:m>
-                  <m:oMath xmlns:m="http://schemas.openxmlformats.org/officeDocument/2006/math">
-                    <m:r>
-                      <a:rPr lang="en-US" altLang="ja-JP" sz="1800" i="1" smtClean="0">
-                        <a:solidFill>
-                          <a:srgbClr val="00B050"/>
-                        </a:solidFill>
-                        <a:latin typeface="Cambria Math" panose="02040503050406030204" pitchFamily="18" charset="0"/>
-                      </a:rPr>
-                      <m:t>[0, </m:t>
-                    </m:r>
-                    <m:r>
-                      <a:rPr lang="en-US" altLang="ja-JP" sz="1800" b="0" i="1" smtClean="0">
-                        <a:solidFill>
-                          <a:srgbClr val="00B050"/>
-                        </a:solidFill>
-                        <a:latin typeface="Cambria Math" panose="02040503050406030204" pitchFamily="18" charset="0"/>
-                      </a:rPr>
-                      <m:t>110</m:t>
-                    </m:r>
-                    <m:r>
-                      <a:rPr lang="en-US" altLang="ja-JP" sz="1800" i="1" smtClean="0">
-                        <a:solidFill>
-                          <a:srgbClr val="00B050"/>
-                        </a:solidFill>
-                        <a:latin typeface="Cambria Math" panose="02040503050406030204" pitchFamily="18" charset="0"/>
-                      </a:rPr>
-                      <m:t>𝑁</m:t>
-                    </m:r>
-                    <m:r>
-                      <a:rPr lang="en-US" altLang="ja-JP" sz="1800" i="1" smtClean="0">
-                        <a:solidFill>
-                          <a:srgbClr val="00B050"/>
-                        </a:solidFill>
-                        <a:latin typeface="Cambria Math" panose="02040503050406030204" pitchFamily="18" charset="0"/>
-                      </a:rPr>
-                      <m:t>]</m:t>
-                    </m:r>
-                  </m:oMath>
-                </a14:m>
-                <a:r>
-                  <a:rPr lang="en-US" altLang="ja-JP" sz="1800" dirty="0">
+                  </a14:m>
+                  <a:r>
+                    <a:rPr lang="en-US" altLang="ja-JP" sz="1800" dirty="0">
+                      <a:solidFill>
+                        <a:srgbClr val="00B050"/>
+                      </a:solidFill>
+                    </a:rPr>
+                    <a:t> </a:t>
+                  </a:r>
+                </a:p>
+              </p:txBody>
+            </p:sp>
+          </mc:Choice>
+          <mc:Fallback>
+            <p:sp>
+              <p:nvSpPr>
+                <p:cNvPr id="14" name="テキスト ボックス 13">
+                  <a:extLst>
+                    <a:ext uri="{FF2B5EF4-FFF2-40B4-BE49-F238E27FC236}">
+                      <a16:creationId xmlns:a16="http://schemas.microsoft.com/office/drawing/2014/main" id="{A59F2E55-2B4C-4A9E-B022-0FA7810E8D75}"/>
+                    </a:ext>
+                  </a:extLst>
+                </p:cNvPr>
+                <p:cNvSpPr txBox="1">
+                  <a:spLocks noRot="1" noChangeAspect="1" noMove="1" noResize="1" noEditPoints="1" noAdjustHandles="1" noChangeArrowheads="1" noChangeShapeType="1" noTextEdit="1"/>
+                </p:cNvSpPr>
+                <p:nvPr/>
+              </p:nvSpPr>
+              <p:spPr>
+                <a:xfrm>
+                  <a:off x="1486424" y="3772688"/>
+                  <a:ext cx="1174376" cy="369332"/>
+                </a:xfrm>
+                <a:prstGeom prst="rect">
+                  <a:avLst/>
+                </a:prstGeom>
+                <a:blipFill>
+                  <a:blip r:embed="rId6"/>
+                  <a:stretch>
+                    <a:fillRect l="-2083" b="-16667"/>
+                  </a:stretch>
+                </a:blipFill>
+              </p:spPr>
+              <p:txBody>
+                <a:bodyPr/>
+                <a:lstStyle/>
+                <a:p>
+                  <a:r>
+                    <a:rPr lang="ja-JP" altLang="en-US">
+                      <a:noFill/>
+                    </a:rPr>
+                    <a:t> </a:t>
+                  </a:r>
+                </a:p>
+              </p:txBody>
+            </p:sp>
+          </mc:Fallback>
+        </mc:AlternateContent>
+        <p:cxnSp>
+          <p:nvCxnSpPr>
+            <p:cNvPr id="15" name="直線矢印コネクタ 14">
+              <a:extLst>
+                <a:ext uri="{FF2B5EF4-FFF2-40B4-BE49-F238E27FC236}">
+                  <a16:creationId xmlns:a16="http://schemas.microsoft.com/office/drawing/2014/main" id="{E94B9AAC-5287-4FAF-8053-B1E8E393C1A0}"/>
+                </a:ext>
+              </a:extLst>
+            </p:cNvPr>
+            <p:cNvCxnSpPr>
+              <a:cxnSpLocks/>
+            </p:cNvCxnSpPr>
+            <p:nvPr/>
+          </p:nvCxnSpPr>
+          <p:spPr>
+            <a:xfrm flipH="1">
+              <a:off x="1747484" y="4921623"/>
+              <a:ext cx="326128" cy="1"/>
+            </a:xfrm>
+            <a:prstGeom prst="straightConnector1">
+              <a:avLst/>
+            </a:prstGeom>
+            <a:ln w="38100">
+              <a:solidFill>
+                <a:srgbClr val="0070C0"/>
+              </a:solidFill>
+              <a:tailEnd type="triangle"/>
+            </a:ln>
+          </p:spPr>
+          <p:style>
+            <a:lnRef idx="1">
+              <a:schemeClr val="accent1"/>
+            </a:lnRef>
+            <a:fillRef idx="0">
+              <a:schemeClr val="accent1"/>
+            </a:fillRef>
+            <a:effectRef idx="0">
+              <a:schemeClr val="accent1"/>
+            </a:effectRef>
+            <a:fontRef idx="minor">
+              <a:schemeClr val="tx1"/>
+            </a:fontRef>
+          </p:style>
+        </p:cxnSp>
+        <mc:AlternateContent xmlns:mc="http://schemas.openxmlformats.org/markup-compatibility/2006">
+          <mc:Choice xmlns:a14="http://schemas.microsoft.com/office/drawing/2010/main" Requires="a14">
+            <p:sp>
+              <p:nvSpPr>
+                <p:cNvPr id="17" name="テキスト ボックス 16">
+                  <a:extLst>
+                    <a:ext uri="{FF2B5EF4-FFF2-40B4-BE49-F238E27FC236}">
+                      <a16:creationId xmlns:a16="http://schemas.microsoft.com/office/drawing/2014/main" id="{0685C82F-52F8-4C79-B1EC-BF6E1AD00595}"/>
+                    </a:ext>
+                  </a:extLst>
+                </p:cNvPr>
+                <p:cNvSpPr txBox="1"/>
+                <p:nvPr/>
+              </p:nvSpPr>
+              <p:spPr>
+                <a:xfrm>
+                  <a:off x="825145" y="5004722"/>
+                  <a:ext cx="1322557" cy="369332"/>
+                </a:xfrm>
+                <a:prstGeom prst="rect">
+                  <a:avLst/>
+                </a:prstGeom>
+                <a:noFill/>
+              </p:spPr>
+              <p:txBody>
+                <a:bodyPr wrap="square">
+                  <a:spAutoFit/>
+                </a:bodyPr>
+                <a:lstStyle/>
+                <a:p>
+                  <a:pPr/>
+                  <a14:m>
+                    <m:oMathPara xmlns:m="http://schemas.openxmlformats.org/officeDocument/2006/math">
+                      <m:oMathParaPr>
+                        <m:jc m:val="centerGroup"/>
+                      </m:oMathParaPr>
+                      <m:oMath xmlns:m="http://schemas.openxmlformats.org/officeDocument/2006/math">
+                        <m:r>
+                          <a:rPr lang="en-US" altLang="ja-JP" sz="1800" b="0" i="1" smtClean="0">
+                            <a:solidFill>
+                              <a:srgbClr val="0070C0"/>
+                            </a:solidFill>
+                            <a:latin typeface="Cambria Math" panose="02040503050406030204" pitchFamily="18" charset="0"/>
+                          </a:rPr>
+                          <m:t>[−2.2</m:t>
+                        </m:r>
+                        <m:r>
+                          <a:rPr lang="en-US" altLang="ja-JP" sz="1800" b="0" i="1" smtClean="0">
+                            <a:solidFill>
+                              <a:srgbClr val="0070C0"/>
+                            </a:solidFill>
+                            <a:latin typeface="Cambria Math" panose="02040503050406030204" pitchFamily="18" charset="0"/>
+                          </a:rPr>
+                          <m:t>𝑁</m:t>
+                        </m:r>
+                        <m:r>
+                          <a:rPr lang="en-US" altLang="ja-JP" sz="1800" b="0" i="1" smtClean="0">
+                            <a:solidFill>
+                              <a:srgbClr val="0070C0"/>
+                            </a:solidFill>
+                            <a:latin typeface="Cambria Math" panose="02040503050406030204" pitchFamily="18" charset="0"/>
+                          </a:rPr>
+                          <m:t>, 0]</m:t>
+                        </m:r>
+                      </m:oMath>
+                    </m:oMathPara>
+                  </a14:m>
+                  <a:endParaRPr lang="ja-JP" altLang="en-US" dirty="0">
                     <a:solidFill>
-                      <a:srgbClr val="00B050"/>
+                      <a:srgbClr val="0070C0"/>
                     </a:solidFill>
-                  </a:rPr>
-                  <a:t> </a:t>
-                </a:r>
-              </a:p>
-            </p:txBody>
-          </p:sp>
-        </mc:Choice>
-        <mc:Fallback xmlns="">
-          <p:sp>
-            <p:nvSpPr>
-              <p:cNvPr id="14" name="テキスト ボックス 13">
-                <a:extLst>
-                  <a:ext uri="{FF2B5EF4-FFF2-40B4-BE49-F238E27FC236}">
-                    <a16:creationId xmlns:a16="http://schemas.microsoft.com/office/drawing/2014/main" id="{A59F2E55-2B4C-4A9E-B022-0FA7810E8D75}"/>
-                  </a:ext>
-                </a:extLst>
-              </p:cNvPr>
-              <p:cNvSpPr txBox="1">
-                <a:spLocks noRot="1" noChangeAspect="1" noMove="1" noResize="1" noEditPoints="1" noAdjustHandles="1" noChangeArrowheads="1" noChangeShapeType="1" noTextEdit="1"/>
-              </p:cNvSpPr>
-              <p:nvPr/>
-            </p:nvSpPr>
-            <p:spPr>
-              <a:xfrm>
-                <a:off x="1486424" y="3772688"/>
-                <a:ext cx="1174376" cy="369332"/>
-              </a:xfrm>
-              <a:prstGeom prst="rect">
-                <a:avLst/>
-              </a:prstGeom>
-              <a:blipFill>
-                <a:blip r:embed="rId6"/>
-                <a:stretch>
-                  <a:fillRect l="-2083" b="-16667"/>
-                </a:stretch>
-              </a:blipFill>
-            </p:spPr>
-            <p:txBody>
-              <a:bodyPr/>
-              <a:lstStyle/>
-              <a:p>
-                <a:r>
-                  <a:rPr lang="ja-JP" altLang="en-US">
-                    <a:noFill/>
-                  </a:rPr>
-                  <a:t> </a:t>
-                </a:r>
-              </a:p>
-            </p:txBody>
-          </p:sp>
-        </mc:Fallback>
-      </mc:AlternateContent>
-      <p:cxnSp>
-        <p:nvCxnSpPr>
-          <p:cNvPr id="15" name="直線矢印コネクタ 14">
-            <a:extLst>
-              <a:ext uri="{FF2B5EF4-FFF2-40B4-BE49-F238E27FC236}">
-                <a16:creationId xmlns:a16="http://schemas.microsoft.com/office/drawing/2014/main" id="{E94B9AAC-5287-4FAF-8053-B1E8E393C1A0}"/>
-              </a:ext>
-            </a:extLst>
-          </p:cNvPr>
-          <p:cNvCxnSpPr>
-            <a:cxnSpLocks/>
-          </p:cNvCxnSpPr>
-          <p:nvPr/>
-        </p:nvCxnSpPr>
-        <p:spPr>
-          <a:xfrm flipH="1">
-            <a:off x="1747484" y="4921623"/>
-            <a:ext cx="326128" cy="1"/>
-          </a:xfrm>
-          <a:prstGeom prst="straightConnector1">
-            <a:avLst/>
-          </a:prstGeom>
-          <a:ln w="38100">
-            <a:solidFill>
-              <a:srgbClr val="0070C0"/>
-            </a:solidFill>
-            <a:tailEnd type="triangle"/>
-          </a:ln>
-        </p:spPr>
-        <p:style>
-          <a:lnRef idx="1">
-            <a:schemeClr val="accent1"/>
-          </a:lnRef>
-          <a:fillRef idx="0">
-            <a:schemeClr val="accent1"/>
-          </a:fillRef>
-          <a:effectRef idx="0">
-            <a:schemeClr val="accent1"/>
-          </a:effectRef>
-          <a:fontRef idx="minor">
-            <a:schemeClr val="tx1"/>
-          </a:fontRef>
-        </p:style>
-      </p:cxnSp>
-      <mc:AlternateContent xmlns:mc="http://schemas.openxmlformats.org/markup-compatibility/2006" xmlns:a14="http://schemas.microsoft.com/office/drawing/2010/main">
-        <mc:Choice Requires="a14">
-          <p:sp>
-            <p:nvSpPr>
-              <p:cNvPr id="17" name="テキスト ボックス 16">
-                <a:extLst>
-                  <a:ext uri="{FF2B5EF4-FFF2-40B4-BE49-F238E27FC236}">
-                    <a16:creationId xmlns:a16="http://schemas.microsoft.com/office/drawing/2014/main" id="{0685C82F-52F8-4C79-B1EC-BF6E1AD00595}"/>
-                  </a:ext>
-                </a:extLst>
-              </p:cNvPr>
-              <p:cNvSpPr txBox="1"/>
-              <p:nvPr/>
-            </p:nvSpPr>
-            <p:spPr>
-              <a:xfrm>
-                <a:off x="825145" y="5004722"/>
-                <a:ext cx="1322557" cy="369332"/>
-              </a:xfrm>
-              <a:prstGeom prst="rect">
-                <a:avLst/>
-              </a:prstGeom>
-              <a:noFill/>
-            </p:spPr>
-            <p:txBody>
-              <a:bodyPr wrap="square">
-                <a:spAutoFit/>
-              </a:bodyPr>
-              <a:lstStyle/>
-              <a:p>
-                <a:pPr/>
-                <a14:m>
-                  <m:oMathPara xmlns:m="http://schemas.openxmlformats.org/officeDocument/2006/math">
-                    <m:oMathParaPr>
-                      <m:jc m:val="centerGroup"/>
-                    </m:oMathParaPr>
-                    <m:oMath xmlns:m="http://schemas.openxmlformats.org/officeDocument/2006/math">
-                      <m:r>
-                        <a:rPr lang="en-US" altLang="ja-JP" sz="1800" b="0" i="1" smtClean="0">
-                          <a:solidFill>
-                            <a:srgbClr val="0070C0"/>
-                          </a:solidFill>
-                          <a:latin typeface="Cambria Math" panose="02040503050406030204" pitchFamily="18" charset="0"/>
-                        </a:rPr>
-                        <m:t>[−2.2</m:t>
-                      </m:r>
-                      <m:r>
-                        <a:rPr lang="en-US" altLang="ja-JP" sz="1800" b="0" i="1" smtClean="0">
-                          <a:solidFill>
-                            <a:srgbClr val="0070C0"/>
-                          </a:solidFill>
-                          <a:latin typeface="Cambria Math" panose="02040503050406030204" pitchFamily="18" charset="0"/>
-                        </a:rPr>
-                        <m:t>𝑁</m:t>
-                      </m:r>
-                      <m:r>
-                        <a:rPr lang="en-US" altLang="ja-JP" sz="1800" b="0" i="1" smtClean="0">
-                          <a:solidFill>
-                            <a:srgbClr val="0070C0"/>
-                          </a:solidFill>
-                          <a:latin typeface="Cambria Math" panose="02040503050406030204" pitchFamily="18" charset="0"/>
-                        </a:rPr>
-                        <m:t>, 0]</m:t>
-                      </m:r>
-                    </m:oMath>
-                  </m:oMathPara>
-                </a14:m>
-                <a:endParaRPr lang="ja-JP" altLang="en-US" dirty="0">
-                  <a:solidFill>
-                    <a:srgbClr val="0070C0"/>
-                  </a:solidFill>
-                </a:endParaRPr>
-              </a:p>
-            </p:txBody>
-          </p:sp>
-        </mc:Choice>
-        <mc:Fallback xmlns="">
-          <p:sp>
-            <p:nvSpPr>
-              <p:cNvPr id="17" name="テキスト ボックス 16">
-                <a:extLst>
-                  <a:ext uri="{FF2B5EF4-FFF2-40B4-BE49-F238E27FC236}">
-                    <a16:creationId xmlns:a16="http://schemas.microsoft.com/office/drawing/2014/main" id="{0685C82F-52F8-4C79-B1EC-BF6E1AD00595}"/>
-                  </a:ext>
-                </a:extLst>
-              </p:cNvPr>
-              <p:cNvSpPr txBox="1">
-                <a:spLocks noRot="1" noChangeAspect="1" noMove="1" noResize="1" noEditPoints="1" noAdjustHandles="1" noChangeArrowheads="1" noChangeShapeType="1" noTextEdit="1"/>
-              </p:cNvSpPr>
-              <p:nvPr/>
-            </p:nvSpPr>
-            <p:spPr>
-              <a:xfrm>
-                <a:off x="825145" y="5004722"/>
-                <a:ext cx="1322557" cy="369332"/>
-              </a:xfrm>
-              <a:prstGeom prst="rect">
-                <a:avLst/>
-              </a:prstGeom>
-              <a:blipFill>
-                <a:blip r:embed="rId7"/>
-                <a:stretch>
-                  <a:fillRect b="-14754"/>
-                </a:stretch>
-              </a:blipFill>
-            </p:spPr>
-            <p:txBody>
-              <a:bodyPr/>
-              <a:lstStyle/>
-              <a:p>
-                <a:r>
-                  <a:rPr lang="ja-JP" altLang="en-US">
-                    <a:noFill/>
-                  </a:rPr>
-                  <a:t> </a:t>
-                </a:r>
-              </a:p>
-            </p:txBody>
-          </p:sp>
-        </mc:Fallback>
-      </mc:AlternateContent>
+                  </a:endParaRPr>
+                </a:p>
+              </p:txBody>
+            </p:sp>
+          </mc:Choice>
+          <mc:Fallback>
+            <p:sp>
+              <p:nvSpPr>
+                <p:cNvPr id="17" name="テキスト ボックス 16">
+                  <a:extLst>
+                    <a:ext uri="{FF2B5EF4-FFF2-40B4-BE49-F238E27FC236}">
+                      <a16:creationId xmlns:a16="http://schemas.microsoft.com/office/drawing/2014/main" id="{0685C82F-52F8-4C79-B1EC-BF6E1AD00595}"/>
+                    </a:ext>
+                  </a:extLst>
+                </p:cNvPr>
+                <p:cNvSpPr txBox="1">
+                  <a:spLocks noRot="1" noChangeAspect="1" noMove="1" noResize="1" noEditPoints="1" noAdjustHandles="1" noChangeArrowheads="1" noChangeShapeType="1" noTextEdit="1"/>
+                </p:cNvSpPr>
+                <p:nvPr/>
+              </p:nvSpPr>
+              <p:spPr>
+                <a:xfrm>
+                  <a:off x="825145" y="5004722"/>
+                  <a:ext cx="1322557" cy="369332"/>
+                </a:xfrm>
+                <a:prstGeom prst="rect">
+                  <a:avLst/>
+                </a:prstGeom>
+                <a:blipFill>
+                  <a:blip r:embed="rId7"/>
+                  <a:stretch>
+                    <a:fillRect b="-14754"/>
+                  </a:stretch>
+                </a:blipFill>
+              </p:spPr>
+              <p:txBody>
+                <a:bodyPr/>
+                <a:lstStyle/>
+                <a:p>
+                  <a:r>
+                    <a:rPr lang="ja-JP" altLang="en-US">
+                      <a:noFill/>
+                    </a:rPr>
+                    <a:t> </a:t>
+                  </a:r>
+                </a:p>
+              </p:txBody>
+            </p:sp>
+          </mc:Fallback>
+        </mc:AlternateContent>
+      </p:grpSp>
     </p:spTree>
     <p:extLst>
       <p:ext uri="{BB962C8B-B14F-4D97-AF65-F5344CB8AC3E}">
@@ -5124,56 +5145,6 @@
           </p:sp>
         </mc:Fallback>
       </mc:AlternateContent>
-      <p:sp>
-        <p:nvSpPr>
-          <p:cNvPr id="3" name="正方形/長方形 2">
-            <a:extLst>
-              <a:ext uri="{FF2B5EF4-FFF2-40B4-BE49-F238E27FC236}">
-                <a16:creationId xmlns:a16="http://schemas.microsoft.com/office/drawing/2014/main" id="{5D248159-D1DA-49E7-984D-40C755EC6B3D}"/>
-              </a:ext>
-            </a:extLst>
-          </p:cNvPr>
-          <p:cNvSpPr/>
-          <p:nvPr/>
-        </p:nvSpPr>
-        <p:spPr>
-          <a:xfrm>
-            <a:off x="2073612" y="4356848"/>
-            <a:ext cx="1174376" cy="1129553"/>
-          </a:xfrm>
-          <a:prstGeom prst="rect">
-            <a:avLst/>
-          </a:prstGeom>
-        </p:spPr>
-        <p:style>
-          <a:lnRef idx="2">
-            <a:schemeClr val="accent3">
-              <a:shade val="50000"/>
-            </a:schemeClr>
-          </a:lnRef>
-          <a:fillRef idx="1">
-            <a:schemeClr val="accent3"/>
-          </a:fillRef>
-          <a:effectRef idx="0">
-            <a:schemeClr val="accent3"/>
-          </a:effectRef>
-          <a:fontRef idx="minor">
-            <a:schemeClr val="lt1"/>
-          </a:fontRef>
-        </p:style>
-        <p:txBody>
-          <a:bodyPr rtlCol="0" anchor="ctr"/>
-          <a:lstStyle/>
-          <a:p>
-            <a:pPr algn="ctr"/>
-            <a:r>
-              <a:rPr kumimoji="1" lang="en-US" altLang="ja-JP" b="1" dirty="0"/>
-              <a:t>20kg</a:t>
-            </a:r>
-            <a:endParaRPr kumimoji="1" lang="ja-JP" altLang="en-US" b="1" dirty="0"/>
-          </a:p>
-        </p:txBody>
-      </p:sp>
       <mc:AlternateContent xmlns:mc="http://schemas.openxmlformats.org/markup-compatibility/2006" xmlns:a14="http://schemas.microsoft.com/office/drawing/2010/main">
         <mc:Choice Requires="a14">
           <p:sp>
@@ -5446,712 +5417,785 @@
           </p:sp>
         </mc:Fallback>
       </mc:AlternateContent>
-      <p:cxnSp>
-        <p:nvCxnSpPr>
-          <p:cNvPr id="11" name="直線矢印コネクタ 10">
+      <p:grpSp>
+        <p:nvGrpSpPr>
+          <p:cNvPr id="19" name="グループ化 18">
             <a:extLst>
               <a:ext uri="{FF2B5EF4-FFF2-40B4-BE49-F238E27FC236}">
-                <a16:creationId xmlns:a16="http://schemas.microsoft.com/office/drawing/2014/main" id="{E2AE73B5-EBF3-47A8-BFAA-6C3D70578B76}"/>
+                <a16:creationId xmlns:a16="http://schemas.microsoft.com/office/drawing/2014/main" id="{30B5ECF6-2B86-40E3-9842-82FC31DF63B5}"/>
               </a:ext>
             </a:extLst>
           </p:cNvPr>
-          <p:cNvCxnSpPr>
-            <a:cxnSpLocks/>
-          </p:cNvCxnSpPr>
+          <p:cNvGrpSpPr/>
           <p:nvPr/>
-        </p:nvCxnSpPr>
-        <p:spPr>
+        </p:nvGrpSpPr>
+        <p:grpSpPr>
           <a:xfrm>
-            <a:off x="2605331" y="5486401"/>
-            <a:ext cx="0" cy="1118210"/>
+            <a:off x="825145" y="3466938"/>
+            <a:ext cx="4223410" cy="3137673"/>
+            <a:chOff x="825145" y="3466938"/>
+            <a:chExt cx="4223410" cy="3137673"/>
           </a:xfrm>
-          <a:prstGeom prst="straightConnector1">
-            <a:avLst/>
-          </a:prstGeom>
-          <a:ln w="38100">
-            <a:solidFill>
-              <a:srgbClr val="7030A0"/>
-            </a:solidFill>
-            <a:tailEnd type="triangle"/>
-          </a:ln>
-        </p:spPr>
-        <p:style>
-          <a:lnRef idx="1">
-            <a:schemeClr val="accent1"/>
-          </a:lnRef>
-          <a:fillRef idx="0">
-            <a:schemeClr val="accent1"/>
-          </a:fillRef>
-          <a:effectRef idx="0">
-            <a:schemeClr val="accent1"/>
-          </a:effectRef>
-          <a:fontRef idx="minor">
-            <a:schemeClr val="tx1"/>
-          </a:fontRef>
-        </p:style>
-      </p:cxnSp>
-      <mc:AlternateContent xmlns:mc="http://schemas.openxmlformats.org/markup-compatibility/2006" xmlns:a14="http://schemas.microsoft.com/office/drawing/2010/main">
-        <mc:Choice Requires="a14">
-          <p:sp>
-            <p:nvSpPr>
-              <p:cNvPr id="12" name="テキスト ボックス 11">
-                <a:extLst>
-                  <a:ext uri="{FF2B5EF4-FFF2-40B4-BE49-F238E27FC236}">
-                    <a16:creationId xmlns:a16="http://schemas.microsoft.com/office/drawing/2014/main" id="{5F9C7478-8BE7-40E1-AC23-D3482AE8FC24}"/>
-                  </a:ext>
-                </a:extLst>
-              </p:cNvPr>
-              <p:cNvSpPr txBox="1"/>
-              <p:nvPr/>
-            </p:nvSpPr>
-            <p:spPr>
-              <a:xfrm>
-                <a:off x="2660800" y="5860840"/>
-                <a:ext cx="1174376" cy="369332"/>
-              </a:xfrm>
-              <a:prstGeom prst="rect">
-                <a:avLst/>
-              </a:prstGeom>
-              <a:noFill/>
-            </p:spPr>
-            <p:txBody>
-              <a:bodyPr wrap="square">
-                <a:spAutoFit/>
-              </a:bodyPr>
-              <a:lstStyle/>
-              <a:p>
-                <a14:m>
-                  <m:oMath xmlns:m="http://schemas.openxmlformats.org/officeDocument/2006/math">
-                    <m:r>
-                      <a:rPr lang="en-US" altLang="ja-JP" sz="1800" i="1" smtClean="0">
-                        <a:solidFill>
-                          <a:srgbClr val="7030A0"/>
-                        </a:solidFill>
-                        <a:latin typeface="Cambria Math" panose="02040503050406030204" pitchFamily="18" charset="0"/>
-                      </a:rPr>
-                      <m:t>[0, </m:t>
-                    </m:r>
-                    <m:r>
-                      <a:rPr lang="en-US" altLang="ja-JP" sz="1800" b="0" i="1" smtClean="0">
-                        <a:solidFill>
-                          <a:srgbClr val="7030A0"/>
-                        </a:solidFill>
-                        <a:latin typeface="Cambria Math" panose="02040503050406030204" pitchFamily="18" charset="0"/>
-                      </a:rPr>
-                      <m:t>−</m:t>
-                    </m:r>
-                    <m:r>
-                      <a:rPr lang="en-US" altLang="ja-JP" sz="1800" i="1" smtClean="0">
-                        <a:solidFill>
-                          <a:srgbClr val="7030A0"/>
-                        </a:solidFill>
-                        <a:latin typeface="Cambria Math" panose="02040503050406030204" pitchFamily="18" charset="0"/>
-                      </a:rPr>
-                      <m:t>196</m:t>
-                    </m:r>
-                    <m:r>
-                      <a:rPr lang="en-US" altLang="ja-JP" sz="1800" i="1" smtClean="0">
-                        <a:solidFill>
-                          <a:srgbClr val="7030A0"/>
-                        </a:solidFill>
-                        <a:latin typeface="Cambria Math" panose="02040503050406030204" pitchFamily="18" charset="0"/>
-                      </a:rPr>
-                      <m:t>𝑁</m:t>
-                    </m:r>
-                    <m:r>
-                      <a:rPr lang="en-US" altLang="ja-JP" sz="1800" i="1" smtClean="0">
-                        <a:solidFill>
-                          <a:srgbClr val="7030A0"/>
-                        </a:solidFill>
-                        <a:latin typeface="Cambria Math" panose="02040503050406030204" pitchFamily="18" charset="0"/>
-                      </a:rPr>
-                      <m:t>]</m:t>
-                    </m:r>
-                  </m:oMath>
-                </a14:m>
-                <a:r>
-                  <a:rPr lang="en-US" altLang="ja-JP" sz="1800" dirty="0">
-                    <a:solidFill>
-                      <a:srgbClr val="7030A0"/>
-                    </a:solidFill>
-                  </a:rPr>
-                  <a:t> </a:t>
-                </a:r>
-              </a:p>
-            </p:txBody>
-          </p:sp>
-        </mc:Choice>
-        <mc:Fallback xmlns="">
-          <p:sp>
-            <p:nvSpPr>
-              <p:cNvPr id="12" name="テキスト ボックス 11">
-                <a:extLst>
-                  <a:ext uri="{FF2B5EF4-FFF2-40B4-BE49-F238E27FC236}">
-                    <a16:creationId xmlns:a16="http://schemas.microsoft.com/office/drawing/2014/main" id="{5F9C7478-8BE7-40E1-AC23-D3482AE8FC24}"/>
-                  </a:ext>
-                </a:extLst>
-              </p:cNvPr>
-              <p:cNvSpPr txBox="1">
-                <a:spLocks noRot="1" noChangeAspect="1" noMove="1" noResize="1" noEditPoints="1" noAdjustHandles="1" noChangeArrowheads="1" noChangeShapeType="1" noTextEdit="1"/>
-              </p:cNvSpPr>
-              <p:nvPr/>
-            </p:nvSpPr>
-            <p:spPr>
-              <a:xfrm>
-                <a:off x="2660800" y="5860840"/>
-                <a:ext cx="1174376" cy="369332"/>
-              </a:xfrm>
-              <a:prstGeom prst="rect">
-                <a:avLst/>
-              </a:prstGeom>
-              <a:blipFill>
-                <a:blip r:embed="rId4"/>
-                <a:stretch>
-                  <a:fillRect l="-1554" r="-10881" b="-14754"/>
-                </a:stretch>
-              </a:blipFill>
-            </p:spPr>
-            <p:txBody>
-              <a:bodyPr/>
-              <a:lstStyle/>
-              <a:p>
-                <a:r>
-                  <a:rPr lang="ja-JP" altLang="en-US">
-                    <a:noFill/>
-                  </a:rPr>
-                  <a:t> </a:t>
-                </a:r>
-              </a:p>
-            </p:txBody>
-          </p:sp>
-        </mc:Fallback>
-      </mc:AlternateContent>
-      <p:cxnSp>
-        <p:nvCxnSpPr>
-          <p:cNvPr id="5" name="直線矢印コネクタ 4">
-            <a:extLst>
-              <a:ext uri="{FF2B5EF4-FFF2-40B4-BE49-F238E27FC236}">
-                <a16:creationId xmlns:a16="http://schemas.microsoft.com/office/drawing/2014/main" id="{CA53EC50-58D3-40C5-8C2F-BABEE5FA8DD1}"/>
-              </a:ext>
-            </a:extLst>
-          </p:cNvPr>
-          <p:cNvCxnSpPr/>
-          <p:nvPr/>
-        </p:nvCxnSpPr>
-        <p:spPr>
-          <a:xfrm flipV="1">
-            <a:off x="3247988" y="3466938"/>
-            <a:ext cx="880259" cy="1030942"/>
-          </a:xfrm>
-          <a:prstGeom prst="straightConnector1">
-            <a:avLst/>
-          </a:prstGeom>
-          <a:ln w="38100">
-            <a:solidFill>
-              <a:srgbClr val="FFC000"/>
-            </a:solidFill>
-            <a:tailEnd type="triangle"/>
-          </a:ln>
-        </p:spPr>
-        <p:style>
-          <a:lnRef idx="1">
-            <a:schemeClr val="accent1"/>
-          </a:lnRef>
-          <a:fillRef idx="0">
-            <a:schemeClr val="accent1"/>
-          </a:fillRef>
-          <a:effectRef idx="0">
-            <a:schemeClr val="accent1"/>
-          </a:effectRef>
-          <a:fontRef idx="minor">
-            <a:schemeClr val="tx1"/>
-          </a:fontRef>
-        </p:style>
-      </p:cxnSp>
-      <mc:AlternateContent xmlns:mc="http://schemas.openxmlformats.org/markup-compatibility/2006" xmlns:a14="http://schemas.microsoft.com/office/drawing/2010/main">
-        <mc:Choice Requires="a14">
-          <p:sp>
-            <p:nvSpPr>
-              <p:cNvPr id="13" name="テキスト ボックス 12">
-                <a:extLst>
-                  <a:ext uri="{FF2B5EF4-FFF2-40B4-BE49-F238E27FC236}">
-                    <a16:creationId xmlns:a16="http://schemas.microsoft.com/office/drawing/2014/main" id="{E26530F0-EA8A-4C50-8CC5-5C124E0DF2CF}"/>
-                  </a:ext>
-                </a:extLst>
-              </p:cNvPr>
-              <p:cNvSpPr txBox="1"/>
-              <p:nvPr/>
-            </p:nvSpPr>
-            <p:spPr>
-              <a:xfrm>
-                <a:off x="1242010" y="4071911"/>
-                <a:ext cx="6096000" cy="369332"/>
-              </a:xfrm>
-              <a:prstGeom prst="rect">
-                <a:avLst/>
-              </a:prstGeom>
-              <a:noFill/>
-            </p:spPr>
-            <p:txBody>
-              <a:bodyPr wrap="square">
-                <a:spAutoFit/>
-              </a:bodyPr>
-              <a:lstStyle/>
-              <a:p>
-                <a:pPr/>
-                <a14:m>
-                  <m:oMathPara xmlns:m="http://schemas.openxmlformats.org/officeDocument/2006/math">
-                    <m:oMathParaPr>
-                      <m:jc m:val="centerGroup"/>
-                    </m:oMathParaPr>
+        </p:grpSpPr>
+        <p:sp>
+          <p:nvSpPr>
+            <p:cNvPr id="3" name="正方形/長方形 2">
+              <a:extLst>
+                <a:ext uri="{FF2B5EF4-FFF2-40B4-BE49-F238E27FC236}">
+                  <a16:creationId xmlns:a16="http://schemas.microsoft.com/office/drawing/2014/main" id="{5D248159-D1DA-49E7-984D-40C755EC6B3D}"/>
+                </a:ext>
+              </a:extLst>
+            </p:cNvPr>
+            <p:cNvSpPr/>
+            <p:nvPr/>
+          </p:nvSpPr>
+          <p:spPr>
+            <a:xfrm>
+              <a:off x="2073612" y="4356848"/>
+              <a:ext cx="1174376" cy="1129553"/>
+            </a:xfrm>
+            <a:prstGeom prst="rect">
+              <a:avLst/>
+            </a:prstGeom>
+          </p:spPr>
+          <p:style>
+            <a:lnRef idx="2">
+              <a:schemeClr val="accent3">
+                <a:shade val="50000"/>
+              </a:schemeClr>
+            </a:lnRef>
+            <a:fillRef idx="1">
+              <a:schemeClr val="accent3"/>
+            </a:fillRef>
+            <a:effectRef idx="0">
+              <a:schemeClr val="accent3"/>
+            </a:effectRef>
+            <a:fontRef idx="minor">
+              <a:schemeClr val="lt1"/>
+            </a:fontRef>
+          </p:style>
+          <p:txBody>
+            <a:bodyPr rtlCol="0" anchor="ctr"/>
+            <a:lstStyle/>
+            <a:p>
+              <a:pPr algn="ctr"/>
+              <a:r>
+                <a:rPr kumimoji="1" lang="en-US" altLang="ja-JP" b="1" dirty="0"/>
+                <a:t>20kg</a:t>
+              </a:r>
+              <a:endParaRPr kumimoji="1" lang="ja-JP" altLang="en-US" b="1" dirty="0"/>
+            </a:p>
+          </p:txBody>
+        </p:sp>
+        <p:cxnSp>
+          <p:nvCxnSpPr>
+            <p:cNvPr id="11" name="直線矢印コネクタ 10">
+              <a:extLst>
+                <a:ext uri="{FF2B5EF4-FFF2-40B4-BE49-F238E27FC236}">
+                  <a16:creationId xmlns:a16="http://schemas.microsoft.com/office/drawing/2014/main" id="{E2AE73B5-EBF3-47A8-BFAA-6C3D70578B76}"/>
+                </a:ext>
+              </a:extLst>
+            </p:cNvPr>
+            <p:cNvCxnSpPr>
+              <a:cxnSpLocks/>
+            </p:cNvCxnSpPr>
+            <p:nvPr/>
+          </p:nvCxnSpPr>
+          <p:spPr>
+            <a:xfrm>
+              <a:off x="2605331" y="5486401"/>
+              <a:ext cx="0" cy="1118210"/>
+            </a:xfrm>
+            <a:prstGeom prst="straightConnector1">
+              <a:avLst/>
+            </a:prstGeom>
+            <a:ln w="38100">
+              <a:solidFill>
+                <a:srgbClr val="7030A0"/>
+              </a:solidFill>
+              <a:tailEnd type="triangle"/>
+            </a:ln>
+          </p:spPr>
+          <p:style>
+            <a:lnRef idx="1">
+              <a:schemeClr val="accent1"/>
+            </a:lnRef>
+            <a:fillRef idx="0">
+              <a:schemeClr val="accent1"/>
+            </a:fillRef>
+            <a:effectRef idx="0">
+              <a:schemeClr val="accent1"/>
+            </a:effectRef>
+            <a:fontRef idx="minor">
+              <a:schemeClr val="tx1"/>
+            </a:fontRef>
+          </p:style>
+        </p:cxnSp>
+        <mc:AlternateContent xmlns:mc="http://schemas.openxmlformats.org/markup-compatibility/2006">
+          <mc:Choice xmlns:a14="http://schemas.microsoft.com/office/drawing/2010/main" Requires="a14">
+            <p:sp>
+              <p:nvSpPr>
+                <p:cNvPr id="12" name="テキスト ボックス 11">
+                  <a:extLst>
+                    <a:ext uri="{FF2B5EF4-FFF2-40B4-BE49-F238E27FC236}">
+                      <a16:creationId xmlns:a16="http://schemas.microsoft.com/office/drawing/2014/main" id="{5F9C7478-8BE7-40E1-AC23-D3482AE8FC24}"/>
+                    </a:ext>
+                  </a:extLst>
+                </p:cNvPr>
+                <p:cNvSpPr txBox="1"/>
+                <p:nvPr/>
+              </p:nvSpPr>
+              <p:spPr>
+                <a:xfrm>
+                  <a:off x="2660800" y="5860840"/>
+                  <a:ext cx="1174376" cy="369332"/>
+                </a:xfrm>
+                <a:prstGeom prst="rect">
+                  <a:avLst/>
+                </a:prstGeom>
+                <a:noFill/>
+              </p:spPr>
+              <p:txBody>
+                <a:bodyPr wrap="square">
+                  <a:spAutoFit/>
+                </a:bodyPr>
+                <a:lstStyle/>
+                <a:p>
+                  <a14:m>
                     <m:oMath xmlns:m="http://schemas.openxmlformats.org/officeDocument/2006/math">
                       <m:r>
                         <a:rPr lang="en-US" altLang="ja-JP" sz="1800" i="1" smtClean="0">
                           <a:solidFill>
-                            <a:srgbClr val="FFC000"/>
+                            <a:srgbClr val="7030A0"/>
                           </a:solidFill>
                           <a:latin typeface="Cambria Math" panose="02040503050406030204" pitchFamily="18" charset="0"/>
                         </a:rPr>
-                        <m:t>[</m:t>
+                        <m:t>[0, </m:t>
                       </m:r>
                       <m:r>
                         <a:rPr lang="en-US" altLang="ja-JP" sz="1800" b="0" i="1" smtClean="0">
                           <a:solidFill>
-                            <a:srgbClr val="FFC000"/>
+                            <a:srgbClr val="7030A0"/>
                           </a:solidFill>
                           <a:latin typeface="Cambria Math" panose="02040503050406030204" pitchFamily="18" charset="0"/>
                         </a:rPr>
-                        <m:t>50</m:t>
+                        <m:t>−</m:t>
                       </m:r>
                       <m:r>
-                        <a:rPr lang="en-US" altLang="ja-JP" sz="1800" b="0" i="1" smtClean="0">
+                        <a:rPr lang="en-US" altLang="ja-JP" sz="1800" i="1" smtClean="0">
                           <a:solidFill>
-                            <a:srgbClr val="FFC000"/>
+                            <a:srgbClr val="7030A0"/>
+                          </a:solidFill>
+                          <a:latin typeface="Cambria Math" panose="02040503050406030204" pitchFamily="18" charset="0"/>
+                        </a:rPr>
+                        <m:t>196</m:t>
+                      </m:r>
+                      <m:r>
+                        <a:rPr lang="en-US" altLang="ja-JP" sz="1800" i="1" smtClean="0">
+                          <a:solidFill>
+                            <a:srgbClr val="7030A0"/>
                           </a:solidFill>
                           <a:latin typeface="Cambria Math" panose="02040503050406030204" pitchFamily="18" charset="0"/>
                         </a:rPr>
                         <m:t>𝑁</m:t>
                       </m:r>
                       <m:r>
-                        <a:rPr lang="en-US" altLang="ja-JP" sz="1800" b="0" i="1" smtClean="0">
+                        <a:rPr lang="en-US" altLang="ja-JP" sz="1800" i="1" smtClean="0">
                           <a:solidFill>
-                            <a:srgbClr val="FFC000"/>
+                            <a:srgbClr val="7030A0"/>
                           </a:solidFill>
                           <a:latin typeface="Cambria Math" panose="02040503050406030204" pitchFamily="18" charset="0"/>
                         </a:rPr>
-                        <m:t>,86</m:t>
+                        <m:t>]</m:t>
+                      </m:r>
+                    </m:oMath>
+                  </a14:m>
+                  <a:r>
+                    <a:rPr lang="en-US" altLang="ja-JP" sz="1800" dirty="0">
+                      <a:solidFill>
+                        <a:srgbClr val="7030A0"/>
+                      </a:solidFill>
+                    </a:rPr>
+                    <a:t> </a:t>
+                  </a:r>
+                </a:p>
+              </p:txBody>
+            </p:sp>
+          </mc:Choice>
+          <mc:Fallback>
+            <p:sp>
+              <p:nvSpPr>
+                <p:cNvPr id="12" name="テキスト ボックス 11">
+                  <a:extLst>
+                    <a:ext uri="{FF2B5EF4-FFF2-40B4-BE49-F238E27FC236}">
+                      <a16:creationId xmlns:a16="http://schemas.microsoft.com/office/drawing/2014/main" id="{5F9C7478-8BE7-40E1-AC23-D3482AE8FC24}"/>
+                    </a:ext>
+                  </a:extLst>
+                </p:cNvPr>
+                <p:cNvSpPr txBox="1">
+                  <a:spLocks noRot="1" noChangeAspect="1" noMove="1" noResize="1" noEditPoints="1" noAdjustHandles="1" noChangeArrowheads="1" noChangeShapeType="1" noTextEdit="1"/>
+                </p:cNvSpPr>
+                <p:nvPr/>
+              </p:nvSpPr>
+              <p:spPr>
+                <a:xfrm>
+                  <a:off x="2660800" y="5860840"/>
+                  <a:ext cx="1174376" cy="369332"/>
+                </a:xfrm>
+                <a:prstGeom prst="rect">
+                  <a:avLst/>
+                </a:prstGeom>
+                <a:blipFill>
+                  <a:blip r:embed="rId4"/>
+                  <a:stretch>
+                    <a:fillRect l="-1554" r="-10881" b="-14754"/>
+                  </a:stretch>
+                </a:blipFill>
+              </p:spPr>
+              <p:txBody>
+                <a:bodyPr/>
+                <a:lstStyle/>
+                <a:p>
+                  <a:r>
+                    <a:rPr lang="ja-JP" altLang="en-US">
+                      <a:noFill/>
+                    </a:rPr>
+                    <a:t> </a:t>
+                  </a:r>
+                </a:p>
+              </p:txBody>
+            </p:sp>
+          </mc:Fallback>
+        </mc:AlternateContent>
+        <p:cxnSp>
+          <p:nvCxnSpPr>
+            <p:cNvPr id="5" name="直線矢印コネクタ 4">
+              <a:extLst>
+                <a:ext uri="{FF2B5EF4-FFF2-40B4-BE49-F238E27FC236}">
+                  <a16:creationId xmlns:a16="http://schemas.microsoft.com/office/drawing/2014/main" id="{CA53EC50-58D3-40C5-8C2F-BABEE5FA8DD1}"/>
+                </a:ext>
+              </a:extLst>
+            </p:cNvPr>
+            <p:cNvCxnSpPr>
+              <a:cxnSpLocks/>
+            </p:cNvCxnSpPr>
+            <p:nvPr/>
+          </p:nvCxnSpPr>
+          <p:spPr>
+            <a:xfrm flipV="1">
+              <a:off x="3247988" y="3466938"/>
+              <a:ext cx="880259" cy="1030942"/>
+            </a:xfrm>
+            <a:prstGeom prst="straightConnector1">
+              <a:avLst/>
+            </a:prstGeom>
+            <a:ln w="38100">
+              <a:solidFill>
+                <a:srgbClr val="FFC000"/>
+              </a:solidFill>
+              <a:tailEnd type="triangle"/>
+            </a:ln>
+          </p:spPr>
+          <p:style>
+            <a:lnRef idx="1">
+              <a:schemeClr val="accent1"/>
+            </a:lnRef>
+            <a:fillRef idx="0">
+              <a:schemeClr val="accent1"/>
+            </a:fillRef>
+            <a:effectRef idx="0">
+              <a:schemeClr val="accent1"/>
+            </a:effectRef>
+            <a:fontRef idx="minor">
+              <a:schemeClr val="tx1"/>
+            </a:fontRef>
+          </p:style>
+        </p:cxnSp>
+        <mc:AlternateContent xmlns:mc="http://schemas.openxmlformats.org/markup-compatibility/2006">
+          <mc:Choice xmlns:a14="http://schemas.microsoft.com/office/drawing/2010/main" Requires="a14">
+            <p:sp>
+              <p:nvSpPr>
+                <p:cNvPr id="13" name="テキスト ボックス 12">
+                  <a:extLst>
+                    <a:ext uri="{FF2B5EF4-FFF2-40B4-BE49-F238E27FC236}">
+                      <a16:creationId xmlns:a16="http://schemas.microsoft.com/office/drawing/2014/main" id="{E26530F0-EA8A-4C50-8CC5-5C124E0DF2CF}"/>
+                    </a:ext>
+                  </a:extLst>
+                </p:cNvPr>
+                <p:cNvSpPr txBox="1"/>
+                <p:nvPr/>
+              </p:nvSpPr>
+              <p:spPr>
+                <a:xfrm>
+                  <a:off x="3685234" y="4150190"/>
+                  <a:ext cx="1363321" cy="369332"/>
+                </a:xfrm>
+                <a:prstGeom prst="rect">
+                  <a:avLst/>
+                </a:prstGeom>
+                <a:noFill/>
+              </p:spPr>
+              <p:txBody>
+                <a:bodyPr wrap="square">
+                  <a:spAutoFit/>
+                </a:bodyPr>
+                <a:lstStyle/>
+                <a:p>
+                  <a:pPr/>
+                  <a14:m>
+                    <m:oMathPara xmlns:m="http://schemas.openxmlformats.org/officeDocument/2006/math">
+                      <m:oMathParaPr>
+                        <m:jc m:val="centerGroup"/>
+                      </m:oMathParaPr>
+                      <m:oMath xmlns:m="http://schemas.openxmlformats.org/officeDocument/2006/math">
+                        <m:r>
+                          <a:rPr lang="en-US" altLang="ja-JP" sz="1800" i="1" smtClean="0">
+                            <a:solidFill>
+                              <a:srgbClr val="FFC000"/>
+                            </a:solidFill>
+                            <a:latin typeface="Cambria Math" panose="02040503050406030204" pitchFamily="18" charset="0"/>
+                          </a:rPr>
+                          <m:t>[</m:t>
+                        </m:r>
+                        <m:r>
+                          <a:rPr lang="en-US" altLang="ja-JP" sz="1800" b="0" i="1" smtClean="0">
+                            <a:solidFill>
+                              <a:srgbClr val="FFC000"/>
+                            </a:solidFill>
+                            <a:latin typeface="Cambria Math" panose="02040503050406030204" pitchFamily="18" charset="0"/>
+                          </a:rPr>
+                          <m:t>50</m:t>
+                        </m:r>
+                        <m:r>
+                          <a:rPr lang="en-US" altLang="ja-JP" sz="1800" b="0" i="1" smtClean="0">
+                            <a:solidFill>
+                              <a:srgbClr val="FFC000"/>
+                            </a:solidFill>
+                            <a:latin typeface="Cambria Math" panose="02040503050406030204" pitchFamily="18" charset="0"/>
+                          </a:rPr>
+                          <m:t>𝑁</m:t>
+                        </m:r>
+                        <m:r>
+                          <a:rPr lang="en-US" altLang="ja-JP" sz="1800" b="0" i="1" smtClean="0">
+                            <a:solidFill>
+                              <a:srgbClr val="FFC000"/>
+                            </a:solidFill>
+                            <a:latin typeface="Cambria Math" panose="02040503050406030204" pitchFamily="18" charset="0"/>
+                          </a:rPr>
+                          <m:t>,86</m:t>
+                        </m:r>
+                        <m:r>
+                          <a:rPr lang="en-US" altLang="ja-JP" sz="1800" b="0" i="1" smtClean="0">
+                            <a:solidFill>
+                              <a:srgbClr val="FFC000"/>
+                            </a:solidFill>
+                            <a:latin typeface="Cambria Math" panose="02040503050406030204" pitchFamily="18" charset="0"/>
+                          </a:rPr>
+                          <m:t>𝑁</m:t>
+                        </m:r>
+                        <m:r>
+                          <a:rPr lang="en-US" altLang="ja-JP" sz="1800" i="1">
+                            <a:solidFill>
+                              <a:srgbClr val="FFC000"/>
+                            </a:solidFill>
+                            <a:latin typeface="Cambria Math" panose="02040503050406030204" pitchFamily="18" charset="0"/>
+                          </a:rPr>
+                          <m:t>]</m:t>
+                        </m:r>
+                      </m:oMath>
+                    </m:oMathPara>
+                  </a14:m>
+                  <a:endParaRPr lang="ja-JP" altLang="en-US" dirty="0">
+                    <a:solidFill>
+                      <a:srgbClr val="FFC000"/>
+                    </a:solidFill>
+                  </a:endParaRPr>
+                </a:p>
+              </p:txBody>
+            </p:sp>
+          </mc:Choice>
+          <mc:Fallback>
+            <p:sp>
+              <p:nvSpPr>
+                <p:cNvPr id="13" name="テキスト ボックス 12">
+                  <a:extLst>
+                    <a:ext uri="{FF2B5EF4-FFF2-40B4-BE49-F238E27FC236}">
+                      <a16:creationId xmlns:a16="http://schemas.microsoft.com/office/drawing/2014/main" id="{E26530F0-EA8A-4C50-8CC5-5C124E0DF2CF}"/>
+                    </a:ext>
+                  </a:extLst>
+                </p:cNvPr>
+                <p:cNvSpPr txBox="1">
+                  <a:spLocks noRot="1" noChangeAspect="1" noMove="1" noResize="1" noEditPoints="1" noAdjustHandles="1" noChangeArrowheads="1" noChangeShapeType="1" noTextEdit="1"/>
+                </p:cNvSpPr>
+                <p:nvPr/>
+              </p:nvSpPr>
+              <p:spPr>
+                <a:xfrm>
+                  <a:off x="3685234" y="4150190"/>
+                  <a:ext cx="1363321" cy="369332"/>
+                </a:xfrm>
+                <a:prstGeom prst="rect">
+                  <a:avLst/>
+                </a:prstGeom>
+                <a:blipFill>
+                  <a:blip r:embed="rId5"/>
+                  <a:stretch>
+                    <a:fillRect b="-16667"/>
+                  </a:stretch>
+                </a:blipFill>
+              </p:spPr>
+              <p:txBody>
+                <a:bodyPr/>
+                <a:lstStyle/>
+                <a:p>
+                  <a:r>
+                    <a:rPr lang="ja-JP" altLang="en-US">
+                      <a:noFill/>
+                    </a:rPr>
+                    <a:t> </a:t>
+                  </a:r>
+                </a:p>
+              </p:txBody>
+            </p:sp>
+          </mc:Fallback>
+        </mc:AlternateContent>
+        <p:cxnSp>
+          <p:nvCxnSpPr>
+            <p:cNvPr id="10" name="直線矢印コネクタ 9">
+              <a:extLst>
+                <a:ext uri="{FF2B5EF4-FFF2-40B4-BE49-F238E27FC236}">
+                  <a16:creationId xmlns:a16="http://schemas.microsoft.com/office/drawing/2014/main" id="{8B65E137-FF19-45DC-B8AB-48CF040F4DA9}"/>
+                </a:ext>
+              </a:extLst>
+            </p:cNvPr>
+            <p:cNvCxnSpPr>
+              <a:cxnSpLocks/>
+            </p:cNvCxnSpPr>
+            <p:nvPr/>
+          </p:nvCxnSpPr>
+          <p:spPr>
+            <a:xfrm flipV="1">
+              <a:off x="2605331" y="3466938"/>
+              <a:ext cx="0" cy="889911"/>
+            </a:xfrm>
+            <a:prstGeom prst="straightConnector1">
+              <a:avLst/>
+            </a:prstGeom>
+            <a:ln w="38100">
+              <a:solidFill>
+                <a:srgbClr val="00B050"/>
+              </a:solidFill>
+              <a:tailEnd type="triangle"/>
+            </a:ln>
+          </p:spPr>
+          <p:style>
+            <a:lnRef idx="1">
+              <a:schemeClr val="accent1"/>
+            </a:lnRef>
+            <a:fillRef idx="0">
+              <a:schemeClr val="accent1"/>
+            </a:fillRef>
+            <a:effectRef idx="0">
+              <a:schemeClr val="accent1"/>
+            </a:effectRef>
+            <a:fontRef idx="minor">
+              <a:schemeClr val="tx1"/>
+            </a:fontRef>
+          </p:style>
+        </p:cxnSp>
+        <mc:AlternateContent xmlns:mc="http://schemas.openxmlformats.org/markup-compatibility/2006">
+          <mc:Choice xmlns:a14="http://schemas.microsoft.com/office/drawing/2010/main" Requires="a14">
+            <p:sp>
+              <p:nvSpPr>
+                <p:cNvPr id="14" name="テキスト ボックス 13">
+                  <a:extLst>
+                    <a:ext uri="{FF2B5EF4-FFF2-40B4-BE49-F238E27FC236}">
+                      <a16:creationId xmlns:a16="http://schemas.microsoft.com/office/drawing/2014/main" id="{A59F2E55-2B4C-4A9E-B022-0FA7810E8D75}"/>
+                    </a:ext>
+                  </a:extLst>
+                </p:cNvPr>
+                <p:cNvSpPr txBox="1"/>
+                <p:nvPr/>
+              </p:nvSpPr>
+              <p:spPr>
+                <a:xfrm>
+                  <a:off x="1486424" y="3772688"/>
+                  <a:ext cx="1174376" cy="369332"/>
+                </a:xfrm>
+                <a:prstGeom prst="rect">
+                  <a:avLst/>
+                </a:prstGeom>
+                <a:noFill/>
+              </p:spPr>
+              <p:txBody>
+                <a:bodyPr wrap="square">
+                  <a:spAutoFit/>
+                </a:bodyPr>
+                <a:lstStyle/>
+                <a:p>
+                  <a14:m>
+                    <m:oMath xmlns:m="http://schemas.openxmlformats.org/officeDocument/2006/math">
+                      <m:r>
+                        <a:rPr lang="en-US" altLang="ja-JP" sz="1800" i="1" smtClean="0">
+                          <a:solidFill>
+                            <a:srgbClr val="00B050"/>
+                          </a:solidFill>
+                          <a:latin typeface="Cambria Math" panose="02040503050406030204" pitchFamily="18" charset="0"/>
+                        </a:rPr>
+                        <m:t>[0, </m:t>
                       </m:r>
                       <m:r>
                         <a:rPr lang="en-US" altLang="ja-JP" sz="1800" b="0" i="1" smtClean="0">
                           <a:solidFill>
-                            <a:srgbClr val="FFC000"/>
+                            <a:srgbClr val="00B050"/>
+                          </a:solidFill>
+                          <a:latin typeface="Cambria Math" panose="02040503050406030204" pitchFamily="18" charset="0"/>
+                        </a:rPr>
+                        <m:t>110</m:t>
+                      </m:r>
+                      <m:r>
+                        <a:rPr lang="en-US" altLang="ja-JP" sz="1800" i="1" smtClean="0">
+                          <a:solidFill>
+                            <a:srgbClr val="00B050"/>
                           </a:solidFill>
                           <a:latin typeface="Cambria Math" panose="02040503050406030204" pitchFamily="18" charset="0"/>
                         </a:rPr>
                         <m:t>𝑁</m:t>
                       </m:r>
                       <m:r>
-                        <a:rPr lang="en-US" altLang="ja-JP" sz="1800" i="1">
+                        <a:rPr lang="en-US" altLang="ja-JP" sz="1800" i="1" smtClean="0">
                           <a:solidFill>
-                            <a:srgbClr val="FFC000"/>
+                            <a:srgbClr val="00B050"/>
                           </a:solidFill>
                           <a:latin typeface="Cambria Math" panose="02040503050406030204" pitchFamily="18" charset="0"/>
                         </a:rPr>
                         <m:t>]</m:t>
                       </m:r>
                     </m:oMath>
-                  </m:oMathPara>
-                </a14:m>
-                <a:endParaRPr lang="ja-JP" altLang="en-US" dirty="0">
-                  <a:solidFill>
-                    <a:srgbClr val="FFC000"/>
-                  </a:solidFill>
-                </a:endParaRPr>
-              </a:p>
-            </p:txBody>
-          </p:sp>
-        </mc:Choice>
-        <mc:Fallback xmlns="">
-          <p:sp>
-            <p:nvSpPr>
-              <p:cNvPr id="13" name="テキスト ボックス 12">
-                <a:extLst>
-                  <a:ext uri="{FF2B5EF4-FFF2-40B4-BE49-F238E27FC236}">
-                    <a16:creationId xmlns:a16="http://schemas.microsoft.com/office/drawing/2014/main" id="{E26530F0-EA8A-4C50-8CC5-5C124E0DF2CF}"/>
-                  </a:ext>
-                </a:extLst>
-              </p:cNvPr>
-              <p:cNvSpPr txBox="1">
-                <a:spLocks noRot="1" noChangeAspect="1" noMove="1" noResize="1" noEditPoints="1" noAdjustHandles="1" noChangeArrowheads="1" noChangeShapeType="1" noTextEdit="1"/>
-              </p:cNvSpPr>
-              <p:nvPr/>
-            </p:nvSpPr>
-            <p:spPr>
-              <a:xfrm>
-                <a:off x="1242010" y="4071911"/>
-                <a:ext cx="6096000" cy="369332"/>
-              </a:xfrm>
-              <a:prstGeom prst="rect">
-                <a:avLst/>
-              </a:prstGeom>
-              <a:blipFill>
-                <a:blip r:embed="rId5"/>
-                <a:stretch>
-                  <a:fillRect b="-14754"/>
-                </a:stretch>
-              </a:blipFill>
-            </p:spPr>
-            <p:txBody>
-              <a:bodyPr/>
-              <a:lstStyle/>
-              <a:p>
-                <a:r>
-                  <a:rPr lang="ja-JP" altLang="en-US">
-                    <a:noFill/>
-                  </a:rPr>
-                  <a:t> </a:t>
-                </a:r>
-              </a:p>
-            </p:txBody>
-          </p:sp>
-        </mc:Fallback>
-      </mc:AlternateContent>
-      <p:cxnSp>
-        <p:nvCxnSpPr>
-          <p:cNvPr id="10" name="直線矢印コネクタ 9">
-            <a:extLst>
-              <a:ext uri="{FF2B5EF4-FFF2-40B4-BE49-F238E27FC236}">
-                <a16:creationId xmlns:a16="http://schemas.microsoft.com/office/drawing/2014/main" id="{8B65E137-FF19-45DC-B8AB-48CF040F4DA9}"/>
-              </a:ext>
-            </a:extLst>
-          </p:cNvPr>
-          <p:cNvCxnSpPr>
-            <a:cxnSpLocks/>
-          </p:cNvCxnSpPr>
-          <p:nvPr/>
-        </p:nvCxnSpPr>
-        <p:spPr>
-          <a:xfrm flipV="1">
-            <a:off x="2605331" y="3466938"/>
-            <a:ext cx="0" cy="889911"/>
-          </a:xfrm>
-          <a:prstGeom prst="straightConnector1">
-            <a:avLst/>
-          </a:prstGeom>
-          <a:ln w="38100">
-            <a:solidFill>
-              <a:srgbClr val="00B050"/>
-            </a:solidFill>
-            <a:tailEnd type="triangle"/>
-          </a:ln>
-        </p:spPr>
-        <p:style>
-          <a:lnRef idx="1">
-            <a:schemeClr val="accent1"/>
-          </a:lnRef>
-          <a:fillRef idx="0">
-            <a:schemeClr val="accent1"/>
-          </a:fillRef>
-          <a:effectRef idx="0">
-            <a:schemeClr val="accent1"/>
-          </a:effectRef>
-          <a:fontRef idx="minor">
-            <a:schemeClr val="tx1"/>
-          </a:fontRef>
-        </p:style>
-      </p:cxnSp>
-      <mc:AlternateContent xmlns:mc="http://schemas.openxmlformats.org/markup-compatibility/2006" xmlns:a14="http://schemas.microsoft.com/office/drawing/2010/main">
-        <mc:Choice Requires="a14">
-          <p:sp>
-            <p:nvSpPr>
-              <p:cNvPr id="14" name="テキスト ボックス 13">
-                <a:extLst>
-                  <a:ext uri="{FF2B5EF4-FFF2-40B4-BE49-F238E27FC236}">
-                    <a16:creationId xmlns:a16="http://schemas.microsoft.com/office/drawing/2014/main" id="{A59F2E55-2B4C-4A9E-B022-0FA7810E8D75}"/>
-                  </a:ext>
-                </a:extLst>
-              </p:cNvPr>
-              <p:cNvSpPr txBox="1"/>
-              <p:nvPr/>
-            </p:nvSpPr>
-            <p:spPr>
-              <a:xfrm>
-                <a:off x="1486424" y="3772688"/>
-                <a:ext cx="1174376" cy="369332"/>
-              </a:xfrm>
-              <a:prstGeom prst="rect">
-                <a:avLst/>
-              </a:prstGeom>
-              <a:noFill/>
-            </p:spPr>
-            <p:txBody>
-              <a:bodyPr wrap="square">
-                <a:spAutoFit/>
-              </a:bodyPr>
-              <a:lstStyle/>
-              <a:p>
-                <a14:m>
-                  <m:oMath xmlns:m="http://schemas.openxmlformats.org/officeDocument/2006/math">
-                    <m:r>
-                      <a:rPr lang="en-US" altLang="ja-JP" sz="1800" i="1" smtClean="0">
-                        <a:solidFill>
-                          <a:srgbClr val="00B050"/>
-                        </a:solidFill>
-                        <a:latin typeface="Cambria Math" panose="02040503050406030204" pitchFamily="18" charset="0"/>
-                      </a:rPr>
-                      <m:t>[0, </m:t>
-                    </m:r>
-                    <m:r>
-                      <a:rPr lang="en-US" altLang="ja-JP" sz="1800" b="0" i="1" smtClean="0">
-                        <a:solidFill>
-                          <a:srgbClr val="00B050"/>
-                        </a:solidFill>
-                        <a:latin typeface="Cambria Math" panose="02040503050406030204" pitchFamily="18" charset="0"/>
-                      </a:rPr>
-                      <m:t>110</m:t>
-                    </m:r>
-                    <m:r>
-                      <a:rPr lang="en-US" altLang="ja-JP" sz="1800" i="1" smtClean="0">
-                        <a:solidFill>
-                          <a:srgbClr val="00B050"/>
-                        </a:solidFill>
-                        <a:latin typeface="Cambria Math" panose="02040503050406030204" pitchFamily="18" charset="0"/>
-                      </a:rPr>
-                      <m:t>𝑁</m:t>
-                    </m:r>
-                    <m:r>
-                      <a:rPr lang="en-US" altLang="ja-JP" sz="1800" i="1" smtClean="0">
-                        <a:solidFill>
-                          <a:srgbClr val="00B050"/>
-                        </a:solidFill>
-                        <a:latin typeface="Cambria Math" panose="02040503050406030204" pitchFamily="18" charset="0"/>
-                      </a:rPr>
-                      <m:t>]</m:t>
-                    </m:r>
-                  </m:oMath>
-                </a14:m>
-                <a:r>
-                  <a:rPr lang="en-US" altLang="ja-JP" sz="1800" dirty="0">
+                  </a14:m>
+                  <a:r>
+                    <a:rPr lang="en-US" altLang="ja-JP" sz="1800" dirty="0">
+                      <a:solidFill>
+                        <a:srgbClr val="00B050"/>
+                      </a:solidFill>
+                    </a:rPr>
+                    <a:t> </a:t>
+                  </a:r>
+                </a:p>
+              </p:txBody>
+            </p:sp>
+          </mc:Choice>
+          <mc:Fallback>
+            <p:sp>
+              <p:nvSpPr>
+                <p:cNvPr id="14" name="テキスト ボックス 13">
+                  <a:extLst>
+                    <a:ext uri="{FF2B5EF4-FFF2-40B4-BE49-F238E27FC236}">
+                      <a16:creationId xmlns:a16="http://schemas.microsoft.com/office/drawing/2014/main" id="{A59F2E55-2B4C-4A9E-B022-0FA7810E8D75}"/>
+                    </a:ext>
+                  </a:extLst>
+                </p:cNvPr>
+                <p:cNvSpPr txBox="1">
+                  <a:spLocks noRot="1" noChangeAspect="1" noMove="1" noResize="1" noEditPoints="1" noAdjustHandles="1" noChangeArrowheads="1" noChangeShapeType="1" noTextEdit="1"/>
+                </p:cNvSpPr>
+                <p:nvPr/>
+              </p:nvSpPr>
+              <p:spPr>
+                <a:xfrm>
+                  <a:off x="1486424" y="3772688"/>
+                  <a:ext cx="1174376" cy="369332"/>
+                </a:xfrm>
+                <a:prstGeom prst="rect">
+                  <a:avLst/>
+                </a:prstGeom>
+                <a:blipFill>
+                  <a:blip r:embed="rId6"/>
+                  <a:stretch>
+                    <a:fillRect l="-2083" b="-16667"/>
+                  </a:stretch>
+                </a:blipFill>
+              </p:spPr>
+              <p:txBody>
+                <a:bodyPr/>
+                <a:lstStyle/>
+                <a:p>
+                  <a:r>
+                    <a:rPr lang="ja-JP" altLang="en-US">
+                      <a:noFill/>
+                    </a:rPr>
+                    <a:t> </a:t>
+                  </a:r>
+                </a:p>
+              </p:txBody>
+            </p:sp>
+          </mc:Fallback>
+        </mc:AlternateContent>
+        <p:cxnSp>
+          <p:nvCxnSpPr>
+            <p:cNvPr id="15" name="直線矢印コネクタ 14">
+              <a:extLst>
+                <a:ext uri="{FF2B5EF4-FFF2-40B4-BE49-F238E27FC236}">
+                  <a16:creationId xmlns:a16="http://schemas.microsoft.com/office/drawing/2014/main" id="{E94B9AAC-5287-4FAF-8053-B1E8E393C1A0}"/>
+                </a:ext>
+              </a:extLst>
+            </p:cNvPr>
+            <p:cNvCxnSpPr>
+              <a:cxnSpLocks/>
+            </p:cNvCxnSpPr>
+            <p:nvPr/>
+          </p:nvCxnSpPr>
+          <p:spPr>
+            <a:xfrm flipH="1">
+              <a:off x="1747484" y="4921623"/>
+              <a:ext cx="326128" cy="1"/>
+            </a:xfrm>
+            <a:prstGeom prst="straightConnector1">
+              <a:avLst/>
+            </a:prstGeom>
+            <a:ln w="38100">
+              <a:solidFill>
+                <a:srgbClr val="0070C0"/>
+              </a:solidFill>
+              <a:tailEnd type="triangle"/>
+            </a:ln>
+          </p:spPr>
+          <p:style>
+            <a:lnRef idx="1">
+              <a:schemeClr val="accent1"/>
+            </a:lnRef>
+            <a:fillRef idx="0">
+              <a:schemeClr val="accent1"/>
+            </a:fillRef>
+            <a:effectRef idx="0">
+              <a:schemeClr val="accent1"/>
+            </a:effectRef>
+            <a:fontRef idx="minor">
+              <a:schemeClr val="tx1"/>
+            </a:fontRef>
+          </p:style>
+        </p:cxnSp>
+        <mc:AlternateContent xmlns:mc="http://schemas.openxmlformats.org/markup-compatibility/2006">
+          <mc:Choice xmlns:a14="http://schemas.microsoft.com/office/drawing/2010/main" Requires="a14">
+            <p:sp>
+              <p:nvSpPr>
+                <p:cNvPr id="17" name="テキスト ボックス 16">
+                  <a:extLst>
+                    <a:ext uri="{FF2B5EF4-FFF2-40B4-BE49-F238E27FC236}">
+                      <a16:creationId xmlns:a16="http://schemas.microsoft.com/office/drawing/2014/main" id="{0685C82F-52F8-4C79-B1EC-BF6E1AD00595}"/>
+                    </a:ext>
+                  </a:extLst>
+                </p:cNvPr>
+                <p:cNvSpPr txBox="1"/>
+                <p:nvPr/>
+              </p:nvSpPr>
+              <p:spPr>
+                <a:xfrm>
+                  <a:off x="825145" y="5004722"/>
+                  <a:ext cx="1322557" cy="369332"/>
+                </a:xfrm>
+                <a:prstGeom prst="rect">
+                  <a:avLst/>
+                </a:prstGeom>
+                <a:noFill/>
+              </p:spPr>
+              <p:txBody>
+                <a:bodyPr wrap="square">
+                  <a:spAutoFit/>
+                </a:bodyPr>
+                <a:lstStyle/>
+                <a:p>
+                  <a:pPr/>
+                  <a14:m>
+                    <m:oMathPara xmlns:m="http://schemas.openxmlformats.org/officeDocument/2006/math">
+                      <m:oMathParaPr>
+                        <m:jc m:val="centerGroup"/>
+                      </m:oMathParaPr>
+                      <m:oMath xmlns:m="http://schemas.openxmlformats.org/officeDocument/2006/math">
+                        <m:r>
+                          <a:rPr lang="en-US" altLang="ja-JP" sz="1800" b="0" i="1" smtClean="0">
+                            <a:solidFill>
+                              <a:srgbClr val="0070C0"/>
+                            </a:solidFill>
+                            <a:latin typeface="Cambria Math" panose="02040503050406030204" pitchFamily="18" charset="0"/>
+                          </a:rPr>
+                          <m:t>[−2.2</m:t>
+                        </m:r>
+                        <m:r>
+                          <a:rPr lang="en-US" altLang="ja-JP" sz="1800" b="0" i="1" smtClean="0">
+                            <a:solidFill>
+                              <a:srgbClr val="0070C0"/>
+                            </a:solidFill>
+                            <a:latin typeface="Cambria Math" panose="02040503050406030204" pitchFamily="18" charset="0"/>
+                          </a:rPr>
+                          <m:t>𝑁</m:t>
+                        </m:r>
+                        <m:r>
+                          <a:rPr lang="en-US" altLang="ja-JP" sz="1800" b="0" i="1" smtClean="0">
+                            <a:solidFill>
+                              <a:srgbClr val="0070C0"/>
+                            </a:solidFill>
+                            <a:latin typeface="Cambria Math" panose="02040503050406030204" pitchFamily="18" charset="0"/>
+                          </a:rPr>
+                          <m:t>, 0]</m:t>
+                        </m:r>
+                      </m:oMath>
+                    </m:oMathPara>
+                  </a14:m>
+                  <a:endParaRPr lang="ja-JP" altLang="en-US" dirty="0">
                     <a:solidFill>
-                      <a:srgbClr val="00B050"/>
+                      <a:srgbClr val="0070C0"/>
                     </a:solidFill>
-                  </a:rPr>
-                  <a:t> </a:t>
-                </a:r>
-              </a:p>
-            </p:txBody>
-          </p:sp>
-        </mc:Choice>
-        <mc:Fallback xmlns="">
-          <p:sp>
-            <p:nvSpPr>
-              <p:cNvPr id="14" name="テキスト ボックス 13">
-                <a:extLst>
-                  <a:ext uri="{FF2B5EF4-FFF2-40B4-BE49-F238E27FC236}">
-                    <a16:creationId xmlns:a16="http://schemas.microsoft.com/office/drawing/2014/main" id="{A59F2E55-2B4C-4A9E-B022-0FA7810E8D75}"/>
-                  </a:ext>
-                </a:extLst>
-              </p:cNvPr>
-              <p:cNvSpPr txBox="1">
-                <a:spLocks noRot="1" noChangeAspect="1" noMove="1" noResize="1" noEditPoints="1" noAdjustHandles="1" noChangeArrowheads="1" noChangeShapeType="1" noTextEdit="1"/>
-              </p:cNvSpPr>
-              <p:nvPr/>
-            </p:nvSpPr>
-            <p:spPr>
-              <a:xfrm>
-                <a:off x="1486424" y="3772688"/>
-                <a:ext cx="1174376" cy="369332"/>
-              </a:xfrm>
-              <a:prstGeom prst="rect">
-                <a:avLst/>
-              </a:prstGeom>
-              <a:blipFill>
-                <a:blip r:embed="rId6"/>
-                <a:stretch>
-                  <a:fillRect l="-2083" b="-16667"/>
-                </a:stretch>
-              </a:blipFill>
-            </p:spPr>
-            <p:txBody>
-              <a:bodyPr/>
-              <a:lstStyle/>
-              <a:p>
-                <a:r>
-                  <a:rPr lang="ja-JP" altLang="en-US">
-                    <a:noFill/>
-                  </a:rPr>
-                  <a:t> </a:t>
-                </a:r>
-              </a:p>
-            </p:txBody>
-          </p:sp>
-        </mc:Fallback>
-      </mc:AlternateContent>
-      <p:cxnSp>
-        <p:nvCxnSpPr>
-          <p:cNvPr id="15" name="直線矢印コネクタ 14">
-            <a:extLst>
-              <a:ext uri="{FF2B5EF4-FFF2-40B4-BE49-F238E27FC236}">
-                <a16:creationId xmlns:a16="http://schemas.microsoft.com/office/drawing/2014/main" id="{E94B9AAC-5287-4FAF-8053-B1E8E393C1A0}"/>
-              </a:ext>
-            </a:extLst>
-          </p:cNvPr>
-          <p:cNvCxnSpPr>
-            <a:cxnSpLocks/>
-          </p:cNvCxnSpPr>
-          <p:nvPr/>
-        </p:nvCxnSpPr>
-        <p:spPr>
-          <a:xfrm flipH="1">
-            <a:off x="1747484" y="4921623"/>
-            <a:ext cx="326128" cy="1"/>
-          </a:xfrm>
-          <a:prstGeom prst="straightConnector1">
-            <a:avLst/>
-          </a:prstGeom>
-          <a:ln w="38100">
-            <a:solidFill>
-              <a:srgbClr val="0070C0"/>
-            </a:solidFill>
-            <a:tailEnd type="triangle"/>
-          </a:ln>
-        </p:spPr>
-        <p:style>
-          <a:lnRef idx="1">
-            <a:schemeClr val="accent1"/>
-          </a:lnRef>
-          <a:fillRef idx="0">
-            <a:schemeClr val="accent1"/>
-          </a:fillRef>
-          <a:effectRef idx="0">
-            <a:schemeClr val="accent1"/>
-          </a:effectRef>
-          <a:fontRef idx="minor">
-            <a:schemeClr val="tx1"/>
-          </a:fontRef>
-        </p:style>
-      </p:cxnSp>
-      <mc:AlternateContent xmlns:mc="http://schemas.openxmlformats.org/markup-compatibility/2006" xmlns:a14="http://schemas.microsoft.com/office/drawing/2010/main">
-        <mc:Choice Requires="a14">
-          <p:sp>
-            <p:nvSpPr>
-              <p:cNvPr id="17" name="テキスト ボックス 16">
-                <a:extLst>
-                  <a:ext uri="{FF2B5EF4-FFF2-40B4-BE49-F238E27FC236}">
-                    <a16:creationId xmlns:a16="http://schemas.microsoft.com/office/drawing/2014/main" id="{0685C82F-52F8-4C79-B1EC-BF6E1AD00595}"/>
-                  </a:ext>
-                </a:extLst>
-              </p:cNvPr>
-              <p:cNvSpPr txBox="1"/>
-              <p:nvPr/>
-            </p:nvSpPr>
-            <p:spPr>
-              <a:xfrm>
-                <a:off x="825145" y="5004722"/>
-                <a:ext cx="1322557" cy="369332"/>
-              </a:xfrm>
-              <a:prstGeom prst="rect">
-                <a:avLst/>
-              </a:prstGeom>
-              <a:noFill/>
-            </p:spPr>
-            <p:txBody>
-              <a:bodyPr wrap="square">
-                <a:spAutoFit/>
-              </a:bodyPr>
-              <a:lstStyle/>
-              <a:p>
-                <a:pPr/>
-                <a14:m>
-                  <m:oMathPara xmlns:m="http://schemas.openxmlformats.org/officeDocument/2006/math">
-                    <m:oMathParaPr>
-                      <m:jc m:val="centerGroup"/>
-                    </m:oMathParaPr>
-                    <m:oMath xmlns:m="http://schemas.openxmlformats.org/officeDocument/2006/math">
-                      <m:r>
-                        <a:rPr lang="en-US" altLang="ja-JP" sz="1800" b="0" i="1" smtClean="0">
-                          <a:solidFill>
-                            <a:srgbClr val="0070C0"/>
-                          </a:solidFill>
-                          <a:latin typeface="Cambria Math" panose="02040503050406030204" pitchFamily="18" charset="0"/>
-                        </a:rPr>
-                        <m:t>[−2.2</m:t>
-                      </m:r>
-                      <m:r>
-                        <a:rPr lang="en-US" altLang="ja-JP" sz="1800" b="0" i="1" smtClean="0">
-                          <a:solidFill>
-                            <a:srgbClr val="0070C0"/>
-                          </a:solidFill>
-                          <a:latin typeface="Cambria Math" panose="02040503050406030204" pitchFamily="18" charset="0"/>
-                        </a:rPr>
-                        <m:t>𝑁</m:t>
-                      </m:r>
-                      <m:r>
-                        <a:rPr lang="en-US" altLang="ja-JP" sz="1800" b="0" i="1" smtClean="0">
-                          <a:solidFill>
-                            <a:srgbClr val="0070C0"/>
-                          </a:solidFill>
-                          <a:latin typeface="Cambria Math" panose="02040503050406030204" pitchFamily="18" charset="0"/>
-                        </a:rPr>
-                        <m:t>, 0]</m:t>
-                      </m:r>
-                    </m:oMath>
-                  </m:oMathPara>
-                </a14:m>
-                <a:endParaRPr lang="ja-JP" altLang="en-US" dirty="0">
-                  <a:solidFill>
-                    <a:srgbClr val="0070C0"/>
-                  </a:solidFill>
-                </a:endParaRPr>
-              </a:p>
-            </p:txBody>
-          </p:sp>
-        </mc:Choice>
-        <mc:Fallback xmlns="">
-          <p:sp>
-            <p:nvSpPr>
-              <p:cNvPr id="17" name="テキスト ボックス 16">
-                <a:extLst>
-                  <a:ext uri="{FF2B5EF4-FFF2-40B4-BE49-F238E27FC236}">
-                    <a16:creationId xmlns:a16="http://schemas.microsoft.com/office/drawing/2014/main" id="{0685C82F-52F8-4C79-B1EC-BF6E1AD00595}"/>
-                  </a:ext>
-                </a:extLst>
-              </p:cNvPr>
-              <p:cNvSpPr txBox="1">
-                <a:spLocks noRot="1" noChangeAspect="1" noMove="1" noResize="1" noEditPoints="1" noAdjustHandles="1" noChangeArrowheads="1" noChangeShapeType="1" noTextEdit="1"/>
-              </p:cNvSpPr>
-              <p:nvPr/>
-            </p:nvSpPr>
-            <p:spPr>
-              <a:xfrm>
-                <a:off x="825145" y="5004722"/>
-                <a:ext cx="1322557" cy="369332"/>
-              </a:xfrm>
-              <a:prstGeom prst="rect">
-                <a:avLst/>
-              </a:prstGeom>
-              <a:blipFill>
-                <a:blip r:embed="rId7"/>
-                <a:stretch>
-                  <a:fillRect b="-14754"/>
-                </a:stretch>
-              </a:blipFill>
-            </p:spPr>
-            <p:txBody>
-              <a:bodyPr/>
-              <a:lstStyle/>
-              <a:p>
-                <a:r>
-                  <a:rPr lang="ja-JP" altLang="en-US">
-                    <a:noFill/>
-                  </a:rPr>
-                  <a:t> </a:t>
-                </a:r>
-              </a:p>
-            </p:txBody>
-          </p:sp>
-        </mc:Fallback>
-      </mc:AlternateContent>
+                  </a:endParaRPr>
+                </a:p>
+              </p:txBody>
+            </p:sp>
+          </mc:Choice>
+          <mc:Fallback>
+            <p:sp>
+              <p:nvSpPr>
+                <p:cNvPr id="17" name="テキスト ボックス 16">
+                  <a:extLst>
+                    <a:ext uri="{FF2B5EF4-FFF2-40B4-BE49-F238E27FC236}">
+                      <a16:creationId xmlns:a16="http://schemas.microsoft.com/office/drawing/2014/main" id="{0685C82F-52F8-4C79-B1EC-BF6E1AD00595}"/>
+                    </a:ext>
+                  </a:extLst>
+                </p:cNvPr>
+                <p:cNvSpPr txBox="1">
+                  <a:spLocks noRot="1" noChangeAspect="1" noMove="1" noResize="1" noEditPoints="1" noAdjustHandles="1" noChangeArrowheads="1" noChangeShapeType="1" noTextEdit="1"/>
+                </p:cNvSpPr>
+                <p:nvPr/>
+              </p:nvSpPr>
+              <p:spPr>
+                <a:xfrm>
+                  <a:off x="825145" y="5004722"/>
+                  <a:ext cx="1322557" cy="369332"/>
+                </a:xfrm>
+                <a:prstGeom prst="rect">
+                  <a:avLst/>
+                </a:prstGeom>
+                <a:blipFill>
+                  <a:blip r:embed="rId7"/>
+                  <a:stretch>
+                    <a:fillRect b="-14754"/>
+                  </a:stretch>
+                </a:blipFill>
+              </p:spPr>
+              <p:txBody>
+                <a:bodyPr/>
+                <a:lstStyle/>
+                <a:p>
+                  <a:r>
+                    <a:rPr lang="ja-JP" altLang="en-US">
+                      <a:noFill/>
+                    </a:rPr>
+                    <a:t> </a:t>
+                  </a:r>
+                </a:p>
+              </p:txBody>
+            </p:sp>
+          </mc:Fallback>
+        </mc:AlternateContent>
+      </p:grpSp>
       <p:sp>
         <p:nvSpPr>
           <p:cNvPr id="18" name="テキスト ボックス 17">
@@ -6283,8 +6327,8 @@
           </a:p>
         </p:txBody>
       </p:sp>
-      <mc:AlternateContent xmlns:mc="http://schemas.openxmlformats.org/markup-compatibility/2006">
-        <mc:Choice xmlns:a14="http://schemas.microsoft.com/office/drawing/2010/main" Requires="a14">
+      <mc:AlternateContent xmlns:mc="http://schemas.openxmlformats.org/markup-compatibility/2006" xmlns:a14="http://schemas.microsoft.com/office/drawing/2010/main">
+        <mc:Choice Requires="a14">
           <p:sp>
             <p:nvSpPr>
               <p:cNvPr id="6" name="テキスト ボックス 5">
@@ -6403,7 +6447,7 @@
                   </m:oMath>
                 </a14:m>
                 <a:r>
-                  <a:rPr lang="ja-JP" altLang="en-US" sz="2400"/>
+                  <a:rPr lang="ja-JP" altLang="en-US" sz="2400" dirty="0"/>
                   <a:t>で計算すること。</a:t>
                 </a:r>
                 <a:endParaRPr lang="en-US" altLang="ja-JP" sz="2400" dirty="0"/>
@@ -6411,7 +6455,7 @@
             </p:txBody>
           </p:sp>
         </mc:Choice>
-        <mc:Fallback>
+        <mc:Fallback xmlns="">
           <p:sp>
             <p:nvSpPr>
               <p:cNvPr id="6" name="テキスト ボックス 5">
@@ -8655,287 +8699,308 @@
           </p:sp>
         </mc:Fallback>
       </mc:AlternateContent>
-      <p:sp>
-        <p:nvSpPr>
-          <p:cNvPr id="2" name="正方形/長方形 1">
+      <p:grpSp>
+        <p:nvGrpSpPr>
+          <p:cNvPr id="5" name="グループ化 4">
             <a:extLst>
               <a:ext uri="{FF2B5EF4-FFF2-40B4-BE49-F238E27FC236}">
-                <a16:creationId xmlns:a16="http://schemas.microsoft.com/office/drawing/2014/main" id="{9969F263-444C-403B-A94E-2C8A9B1BB2AB}"/>
+                <a16:creationId xmlns:a16="http://schemas.microsoft.com/office/drawing/2014/main" id="{B04A4534-A9AA-4FD7-B617-F6C07872B3AC}"/>
               </a:ext>
             </a:extLst>
           </p:cNvPr>
-          <p:cNvSpPr/>
+          <p:cNvGrpSpPr/>
           <p:nvPr/>
-        </p:nvSpPr>
-        <p:spPr>
+        </p:nvGrpSpPr>
+        <p:grpSpPr>
           <a:xfrm>
-            <a:off x="567542" y="5486401"/>
-            <a:ext cx="4894729" cy="73078"/>
+            <a:off x="567542" y="3572436"/>
+            <a:ext cx="4894729" cy="1987043"/>
+            <a:chOff x="567542" y="3572436"/>
+            <a:chExt cx="4894729" cy="1987043"/>
           </a:xfrm>
-          <a:prstGeom prst="rect">
-            <a:avLst/>
-          </a:prstGeom>
-        </p:spPr>
-        <p:style>
-          <a:lnRef idx="2">
-            <a:schemeClr val="accent1">
-              <a:shade val="50000"/>
-            </a:schemeClr>
-          </a:lnRef>
-          <a:fillRef idx="1">
-            <a:schemeClr val="accent1"/>
-          </a:fillRef>
-          <a:effectRef idx="0">
-            <a:schemeClr val="accent1"/>
-          </a:effectRef>
-          <a:fontRef idx="minor">
-            <a:schemeClr val="lt1"/>
-          </a:fontRef>
-        </p:style>
-        <p:txBody>
-          <a:bodyPr rtlCol="0" anchor="ctr"/>
-          <a:lstStyle/>
-          <a:p>
-            <a:pPr algn="ctr"/>
-            <a:endParaRPr kumimoji="1" lang="ja-JP" altLang="en-US"/>
-          </a:p>
-        </p:txBody>
-      </p:sp>
-      <p:sp>
-        <p:nvSpPr>
-          <p:cNvPr id="3" name="正方形/長方形 2">
-            <a:extLst>
-              <a:ext uri="{FF2B5EF4-FFF2-40B4-BE49-F238E27FC236}">
-                <a16:creationId xmlns:a16="http://schemas.microsoft.com/office/drawing/2014/main" id="{5D248159-D1DA-49E7-984D-40C755EC6B3D}"/>
-              </a:ext>
-            </a:extLst>
-          </p:cNvPr>
-          <p:cNvSpPr/>
-          <p:nvPr/>
-        </p:nvSpPr>
-        <p:spPr>
-          <a:xfrm>
-            <a:off x="2073612" y="4356848"/>
-            <a:ext cx="1174376" cy="1129553"/>
-          </a:xfrm>
-          <a:prstGeom prst="rect">
-            <a:avLst/>
-          </a:prstGeom>
-        </p:spPr>
-        <p:style>
-          <a:lnRef idx="2">
-            <a:schemeClr val="accent3">
-              <a:shade val="50000"/>
-            </a:schemeClr>
-          </a:lnRef>
-          <a:fillRef idx="1">
-            <a:schemeClr val="accent3"/>
-          </a:fillRef>
-          <a:effectRef idx="0">
-            <a:schemeClr val="accent3"/>
-          </a:effectRef>
-          <a:fontRef idx="minor">
-            <a:schemeClr val="lt1"/>
-          </a:fontRef>
-        </p:style>
-        <p:txBody>
-          <a:bodyPr rtlCol="0" anchor="ctr"/>
-          <a:lstStyle/>
-          <a:p>
-            <a:pPr algn="ctr"/>
-            <a:r>
-              <a:rPr kumimoji="1" lang="en-US" altLang="ja-JP" b="1" dirty="0"/>
-              <a:t>20kg</a:t>
-            </a:r>
-            <a:endParaRPr kumimoji="1" lang="ja-JP" altLang="en-US" b="1" dirty="0"/>
-          </a:p>
-        </p:txBody>
-      </p:sp>
-      <mc:AlternateContent xmlns:mc="http://schemas.openxmlformats.org/markup-compatibility/2006" xmlns:a14="http://schemas.microsoft.com/office/drawing/2010/main">
-        <mc:Choice Requires="a14">
-          <p:sp>
-            <p:nvSpPr>
-              <p:cNvPr id="8" name="テキスト ボックス 7">
-                <a:extLst>
-                  <a:ext uri="{FF2B5EF4-FFF2-40B4-BE49-F238E27FC236}">
-                    <a16:creationId xmlns:a16="http://schemas.microsoft.com/office/drawing/2014/main" id="{E875718C-F6A2-4FCA-9B38-2922A7FA5964}"/>
-                  </a:ext>
-                </a:extLst>
-              </p:cNvPr>
-              <p:cNvSpPr txBox="1"/>
-              <p:nvPr/>
-            </p:nvSpPr>
-            <p:spPr>
-              <a:xfrm>
-                <a:off x="3403299" y="4614592"/>
-                <a:ext cx="728084" cy="461665"/>
-              </a:xfrm>
-              <a:prstGeom prst="rect">
-                <a:avLst/>
-              </a:prstGeom>
-              <a:noFill/>
-            </p:spPr>
-            <p:txBody>
-              <a:bodyPr wrap="none" rtlCol="0">
-                <a:spAutoFit/>
-              </a:bodyPr>
-              <a:lstStyle/>
-              <a:p>
-                <a:pPr/>
-                <a14:m>
-                  <m:oMathPara xmlns:m="http://schemas.openxmlformats.org/officeDocument/2006/math">
-                    <m:oMathParaPr>
-                      <m:jc m:val="centerGroup"/>
-                    </m:oMathParaPr>
-                    <m:oMath xmlns:m="http://schemas.openxmlformats.org/officeDocument/2006/math">
-                      <m:r>
-                        <a:rPr lang="en-US" altLang="ja-JP" sz="2400" i="1" dirty="0" smtClean="0">
-                          <a:latin typeface="Cambria Math" panose="02040503050406030204" pitchFamily="18" charset="0"/>
-                        </a:rPr>
-                        <m:t>60</m:t>
-                      </m:r>
-                      <m:r>
-                        <a:rPr lang="en-US" altLang="ja-JP" sz="2400" i="1" dirty="0">
-                          <a:latin typeface="Cambria Math" panose="02040503050406030204" pitchFamily="18" charset="0"/>
-                        </a:rPr>
-                        <m:t>°</m:t>
-                      </m:r>
-                    </m:oMath>
-                  </m:oMathPara>
-                </a14:m>
-                <a:endParaRPr lang="en-US" altLang="ja-JP" sz="2400" dirty="0"/>
-              </a:p>
-            </p:txBody>
-          </p:sp>
-        </mc:Choice>
-        <mc:Fallback xmlns="">
-          <p:sp>
-            <p:nvSpPr>
-              <p:cNvPr id="8" name="テキスト ボックス 7">
-                <a:extLst>
-                  <a:ext uri="{FF2B5EF4-FFF2-40B4-BE49-F238E27FC236}">
-                    <a16:creationId xmlns:a16="http://schemas.microsoft.com/office/drawing/2014/main" id="{E875718C-F6A2-4FCA-9B38-2922A7FA5964}"/>
-                  </a:ext>
-                </a:extLst>
-              </p:cNvPr>
-              <p:cNvSpPr txBox="1">
-                <a:spLocks noRot="1" noChangeAspect="1" noMove="1" noResize="1" noEditPoints="1" noAdjustHandles="1" noChangeArrowheads="1" noChangeShapeType="1" noTextEdit="1"/>
-              </p:cNvSpPr>
-              <p:nvPr/>
-            </p:nvSpPr>
-            <p:spPr>
-              <a:xfrm>
-                <a:off x="3403299" y="4614592"/>
-                <a:ext cx="728084" cy="461665"/>
-              </a:xfrm>
-              <a:prstGeom prst="rect">
-                <a:avLst/>
-              </a:prstGeom>
-              <a:blipFill>
-                <a:blip r:embed="rId3"/>
-                <a:stretch>
-                  <a:fillRect/>
-                </a:stretch>
-              </a:blipFill>
-            </p:spPr>
-            <p:txBody>
-              <a:bodyPr/>
-              <a:lstStyle/>
-              <a:p>
-                <a:r>
-                  <a:rPr lang="ja-JP" altLang="en-US">
-                    <a:noFill/>
-                  </a:rPr>
-                  <a:t> </a:t>
-                </a:r>
-              </a:p>
-            </p:txBody>
-          </p:sp>
-        </mc:Fallback>
-      </mc:AlternateContent>
-      <p:cxnSp>
-        <p:nvCxnSpPr>
-          <p:cNvPr id="10" name="直線矢印コネクタ 9">
-            <a:extLst>
-              <a:ext uri="{FF2B5EF4-FFF2-40B4-BE49-F238E27FC236}">
-                <a16:creationId xmlns:a16="http://schemas.microsoft.com/office/drawing/2014/main" id="{5077C820-506E-4C68-AD02-1D94E0B9FFE9}"/>
-              </a:ext>
-            </a:extLst>
-          </p:cNvPr>
-          <p:cNvCxnSpPr>
-            <a:cxnSpLocks/>
-            <a:stCxn id="3" idx="3"/>
-          </p:cNvCxnSpPr>
-          <p:nvPr/>
-        </p:nvCxnSpPr>
-        <p:spPr>
-          <a:xfrm flipV="1">
-            <a:off x="3247988" y="3572436"/>
-            <a:ext cx="1332832" cy="1349189"/>
-          </a:xfrm>
-          <a:prstGeom prst="straightConnector1">
-            <a:avLst/>
-          </a:prstGeom>
-          <a:ln w="76200">
-            <a:solidFill>
-              <a:schemeClr val="accent2">
-                <a:lumMod val="75000"/>
+        </p:grpSpPr>
+        <p:sp>
+          <p:nvSpPr>
+            <p:cNvPr id="2" name="正方形/長方形 1">
+              <a:extLst>
+                <a:ext uri="{FF2B5EF4-FFF2-40B4-BE49-F238E27FC236}">
+                  <a16:creationId xmlns:a16="http://schemas.microsoft.com/office/drawing/2014/main" id="{9969F263-444C-403B-A94E-2C8A9B1BB2AB}"/>
+                </a:ext>
+              </a:extLst>
+            </p:cNvPr>
+            <p:cNvSpPr/>
+            <p:nvPr/>
+          </p:nvSpPr>
+          <p:spPr>
+            <a:xfrm>
+              <a:off x="567542" y="5486401"/>
+              <a:ext cx="4894729" cy="73078"/>
+            </a:xfrm>
+            <a:prstGeom prst="rect">
+              <a:avLst/>
+            </a:prstGeom>
+          </p:spPr>
+          <p:style>
+            <a:lnRef idx="2">
+              <a:schemeClr val="accent1">
+                <a:shade val="50000"/>
               </a:schemeClr>
-            </a:solidFill>
-            <a:tailEnd type="triangle"/>
-          </a:ln>
-        </p:spPr>
-        <p:style>
-          <a:lnRef idx="1">
-            <a:schemeClr val="accent1"/>
-          </a:lnRef>
-          <a:fillRef idx="0">
-            <a:schemeClr val="accent1"/>
-          </a:fillRef>
-          <a:effectRef idx="0">
-            <a:schemeClr val="accent1"/>
-          </a:effectRef>
-          <a:fontRef idx="minor">
-            <a:schemeClr val="tx1"/>
-          </a:fontRef>
-        </p:style>
-      </p:cxnSp>
-      <p:sp>
-        <p:nvSpPr>
-          <p:cNvPr id="15" name="テキスト ボックス 14">
-            <a:extLst>
-              <a:ext uri="{FF2B5EF4-FFF2-40B4-BE49-F238E27FC236}">
-                <a16:creationId xmlns:a16="http://schemas.microsoft.com/office/drawing/2014/main" id="{7A00EC97-2962-46C1-9297-D5B87EF8F61D}"/>
-              </a:ext>
-            </a:extLst>
-          </p:cNvPr>
-          <p:cNvSpPr txBox="1"/>
-          <p:nvPr/>
-        </p:nvSpPr>
-        <p:spPr>
-          <a:xfrm>
-            <a:off x="3297150" y="3762038"/>
-            <a:ext cx="762000" cy="369332"/>
-          </a:xfrm>
-          <a:prstGeom prst="rect">
-            <a:avLst/>
-          </a:prstGeom>
-          <a:noFill/>
-        </p:spPr>
-        <p:txBody>
-          <a:bodyPr wrap="square">
-            <a:spAutoFit/>
-          </a:bodyPr>
-          <a:lstStyle/>
-          <a:p>
-            <a:r>
-              <a:rPr lang="en-US" altLang="ja-JP" sz="1800" b="1" dirty="0"/>
-              <a:t>100N</a:t>
-            </a:r>
-            <a:endParaRPr lang="ja-JP" altLang="en-US" b="1" dirty="0"/>
-          </a:p>
-        </p:txBody>
-      </p:sp>
+            </a:lnRef>
+            <a:fillRef idx="1">
+              <a:schemeClr val="accent1"/>
+            </a:fillRef>
+            <a:effectRef idx="0">
+              <a:schemeClr val="accent1"/>
+            </a:effectRef>
+            <a:fontRef idx="minor">
+              <a:schemeClr val="lt1"/>
+            </a:fontRef>
+          </p:style>
+          <p:txBody>
+            <a:bodyPr rtlCol="0" anchor="ctr"/>
+            <a:lstStyle/>
+            <a:p>
+              <a:pPr algn="ctr"/>
+              <a:endParaRPr kumimoji="1" lang="ja-JP" altLang="en-US"/>
+            </a:p>
+          </p:txBody>
+        </p:sp>
+        <p:sp>
+          <p:nvSpPr>
+            <p:cNvPr id="3" name="正方形/長方形 2">
+              <a:extLst>
+                <a:ext uri="{FF2B5EF4-FFF2-40B4-BE49-F238E27FC236}">
+                  <a16:creationId xmlns:a16="http://schemas.microsoft.com/office/drawing/2014/main" id="{5D248159-D1DA-49E7-984D-40C755EC6B3D}"/>
+                </a:ext>
+              </a:extLst>
+            </p:cNvPr>
+            <p:cNvSpPr/>
+            <p:nvPr/>
+          </p:nvSpPr>
+          <p:spPr>
+            <a:xfrm>
+              <a:off x="2073612" y="4356848"/>
+              <a:ext cx="1174376" cy="1129553"/>
+            </a:xfrm>
+            <a:prstGeom prst="rect">
+              <a:avLst/>
+            </a:prstGeom>
+          </p:spPr>
+          <p:style>
+            <a:lnRef idx="2">
+              <a:schemeClr val="accent3">
+                <a:shade val="50000"/>
+              </a:schemeClr>
+            </a:lnRef>
+            <a:fillRef idx="1">
+              <a:schemeClr val="accent3"/>
+            </a:fillRef>
+            <a:effectRef idx="0">
+              <a:schemeClr val="accent3"/>
+            </a:effectRef>
+            <a:fontRef idx="minor">
+              <a:schemeClr val="lt1"/>
+            </a:fontRef>
+          </p:style>
+          <p:txBody>
+            <a:bodyPr rtlCol="0" anchor="ctr"/>
+            <a:lstStyle/>
+            <a:p>
+              <a:pPr algn="ctr"/>
+              <a:r>
+                <a:rPr kumimoji="1" lang="en-US" altLang="ja-JP" b="1" dirty="0"/>
+                <a:t>20kg</a:t>
+              </a:r>
+              <a:endParaRPr kumimoji="1" lang="ja-JP" altLang="en-US" b="1" dirty="0"/>
+            </a:p>
+          </p:txBody>
+        </p:sp>
+        <mc:AlternateContent xmlns:mc="http://schemas.openxmlformats.org/markup-compatibility/2006">
+          <mc:Choice xmlns:a14="http://schemas.microsoft.com/office/drawing/2010/main" Requires="a14">
+            <p:sp>
+              <p:nvSpPr>
+                <p:cNvPr id="8" name="テキスト ボックス 7">
+                  <a:extLst>
+                    <a:ext uri="{FF2B5EF4-FFF2-40B4-BE49-F238E27FC236}">
+                      <a16:creationId xmlns:a16="http://schemas.microsoft.com/office/drawing/2014/main" id="{E875718C-F6A2-4FCA-9B38-2922A7FA5964}"/>
+                    </a:ext>
+                  </a:extLst>
+                </p:cNvPr>
+                <p:cNvSpPr txBox="1"/>
+                <p:nvPr/>
+              </p:nvSpPr>
+              <p:spPr>
+                <a:xfrm>
+                  <a:off x="3403299" y="4614592"/>
+                  <a:ext cx="728084" cy="461665"/>
+                </a:xfrm>
+                <a:prstGeom prst="rect">
+                  <a:avLst/>
+                </a:prstGeom>
+                <a:noFill/>
+              </p:spPr>
+              <p:txBody>
+                <a:bodyPr wrap="none" rtlCol="0">
+                  <a:spAutoFit/>
+                </a:bodyPr>
+                <a:lstStyle/>
+                <a:p>
+                  <a:pPr/>
+                  <a14:m>
+                    <m:oMathPara xmlns:m="http://schemas.openxmlformats.org/officeDocument/2006/math">
+                      <m:oMathParaPr>
+                        <m:jc m:val="centerGroup"/>
+                      </m:oMathParaPr>
+                      <m:oMath xmlns:m="http://schemas.openxmlformats.org/officeDocument/2006/math">
+                        <m:r>
+                          <a:rPr lang="en-US" altLang="ja-JP" sz="2400" i="1" dirty="0" smtClean="0">
+                            <a:latin typeface="Cambria Math" panose="02040503050406030204" pitchFamily="18" charset="0"/>
+                          </a:rPr>
+                          <m:t>60</m:t>
+                        </m:r>
+                        <m:r>
+                          <a:rPr lang="en-US" altLang="ja-JP" sz="2400" i="1" dirty="0">
+                            <a:latin typeface="Cambria Math" panose="02040503050406030204" pitchFamily="18" charset="0"/>
+                          </a:rPr>
+                          <m:t>°</m:t>
+                        </m:r>
+                      </m:oMath>
+                    </m:oMathPara>
+                  </a14:m>
+                  <a:endParaRPr lang="en-US" altLang="ja-JP" sz="2400" dirty="0"/>
+                </a:p>
+              </p:txBody>
+            </p:sp>
+          </mc:Choice>
+          <mc:Fallback>
+            <p:sp>
+              <p:nvSpPr>
+                <p:cNvPr id="8" name="テキスト ボックス 7">
+                  <a:extLst>
+                    <a:ext uri="{FF2B5EF4-FFF2-40B4-BE49-F238E27FC236}">
+                      <a16:creationId xmlns:a16="http://schemas.microsoft.com/office/drawing/2014/main" id="{E875718C-F6A2-4FCA-9B38-2922A7FA5964}"/>
+                    </a:ext>
+                  </a:extLst>
+                </p:cNvPr>
+                <p:cNvSpPr txBox="1">
+                  <a:spLocks noRot="1" noChangeAspect="1" noMove="1" noResize="1" noEditPoints="1" noAdjustHandles="1" noChangeArrowheads="1" noChangeShapeType="1" noTextEdit="1"/>
+                </p:cNvSpPr>
+                <p:nvPr/>
+              </p:nvSpPr>
+              <p:spPr>
+                <a:xfrm>
+                  <a:off x="3403299" y="4614592"/>
+                  <a:ext cx="728084" cy="461665"/>
+                </a:xfrm>
+                <a:prstGeom prst="rect">
+                  <a:avLst/>
+                </a:prstGeom>
+                <a:blipFill>
+                  <a:blip r:embed="rId3"/>
+                  <a:stretch>
+                    <a:fillRect/>
+                  </a:stretch>
+                </a:blipFill>
+              </p:spPr>
+              <p:txBody>
+                <a:bodyPr/>
+                <a:lstStyle/>
+                <a:p>
+                  <a:r>
+                    <a:rPr lang="ja-JP" altLang="en-US">
+                      <a:noFill/>
+                    </a:rPr>
+                    <a:t> </a:t>
+                  </a:r>
+                </a:p>
+              </p:txBody>
+            </p:sp>
+          </mc:Fallback>
+        </mc:AlternateContent>
+        <p:cxnSp>
+          <p:nvCxnSpPr>
+            <p:cNvPr id="10" name="直線矢印コネクタ 9">
+              <a:extLst>
+                <a:ext uri="{FF2B5EF4-FFF2-40B4-BE49-F238E27FC236}">
+                  <a16:creationId xmlns:a16="http://schemas.microsoft.com/office/drawing/2014/main" id="{5077C820-506E-4C68-AD02-1D94E0B9FFE9}"/>
+                </a:ext>
+              </a:extLst>
+            </p:cNvPr>
+            <p:cNvCxnSpPr>
+              <a:cxnSpLocks/>
+              <a:stCxn id="3" idx="3"/>
+            </p:cNvCxnSpPr>
+            <p:nvPr/>
+          </p:nvCxnSpPr>
+          <p:spPr>
+            <a:xfrm flipV="1">
+              <a:off x="3247988" y="3572436"/>
+              <a:ext cx="1332832" cy="1349189"/>
+            </a:xfrm>
+            <a:prstGeom prst="straightConnector1">
+              <a:avLst/>
+            </a:prstGeom>
+            <a:ln w="76200">
+              <a:solidFill>
+                <a:schemeClr val="accent2">
+                  <a:lumMod val="75000"/>
+                </a:schemeClr>
+              </a:solidFill>
+              <a:tailEnd type="triangle"/>
+            </a:ln>
+          </p:spPr>
+          <p:style>
+            <a:lnRef idx="1">
+              <a:schemeClr val="accent1"/>
+            </a:lnRef>
+            <a:fillRef idx="0">
+              <a:schemeClr val="accent1"/>
+            </a:fillRef>
+            <a:effectRef idx="0">
+              <a:schemeClr val="accent1"/>
+            </a:effectRef>
+            <a:fontRef idx="minor">
+              <a:schemeClr val="tx1"/>
+            </a:fontRef>
+          </p:style>
+        </p:cxnSp>
+        <p:sp>
+          <p:nvSpPr>
+            <p:cNvPr id="15" name="テキスト ボックス 14">
+              <a:extLst>
+                <a:ext uri="{FF2B5EF4-FFF2-40B4-BE49-F238E27FC236}">
+                  <a16:creationId xmlns:a16="http://schemas.microsoft.com/office/drawing/2014/main" id="{7A00EC97-2962-46C1-9297-D5B87EF8F61D}"/>
+                </a:ext>
+              </a:extLst>
+            </p:cNvPr>
+            <p:cNvSpPr txBox="1"/>
+            <p:nvPr/>
+          </p:nvSpPr>
+          <p:spPr>
+            <a:xfrm>
+              <a:off x="3297150" y="3762038"/>
+              <a:ext cx="762000" cy="369332"/>
+            </a:xfrm>
+            <a:prstGeom prst="rect">
+              <a:avLst/>
+            </a:prstGeom>
+            <a:noFill/>
+          </p:spPr>
+          <p:txBody>
+            <a:bodyPr wrap="square">
+              <a:spAutoFit/>
+            </a:bodyPr>
+            <a:lstStyle/>
+            <a:p>
+              <a:r>
+                <a:rPr lang="en-US" altLang="ja-JP" sz="1800" b="1" dirty="0"/>
+                <a:t>100N</a:t>
+              </a:r>
+              <a:endParaRPr lang="ja-JP" altLang="en-US" b="1" dirty="0"/>
+            </a:p>
+          </p:txBody>
+        </p:sp>
+      </p:grpSp>
       <p:sp>
         <p:nvSpPr>
           <p:cNvPr id="16" name="テキスト ボックス 15">
@@ -9237,8 +9302,8 @@
           </a:p>
         </p:txBody>
       </p:sp>
-      <mc:AlternateContent xmlns:mc="http://schemas.openxmlformats.org/markup-compatibility/2006" xmlns:a14="http://schemas.microsoft.com/office/drawing/2010/main">
-        <mc:Choice Requires="a14">
+      <mc:AlternateContent xmlns:mc="http://schemas.openxmlformats.org/markup-compatibility/2006">
+        <mc:Choice xmlns:a14="http://schemas.microsoft.com/office/drawing/2010/main" Requires="a14">
           <p:sp>
             <p:nvSpPr>
               <p:cNvPr id="16" name="テキスト ボックス 15">
@@ -9421,7 +9486,7 @@
             </p:txBody>
           </p:sp>
         </mc:Choice>
-        <mc:Fallback xmlns="">
+        <mc:Fallback>
           <p:sp>
             <p:nvSpPr>
               <p:cNvPr id="16" name="テキスト ボックス 15">
@@ -10784,8 +10849,8 @@
           </a:p>
         </p:txBody>
       </p:sp>
-      <mc:AlternateContent xmlns:mc="http://schemas.openxmlformats.org/markup-compatibility/2006" xmlns:a14="http://schemas.microsoft.com/office/drawing/2010/main">
-        <mc:Choice Requires="a14">
+      <mc:AlternateContent xmlns:mc="http://schemas.openxmlformats.org/markup-compatibility/2006">
+        <mc:Choice xmlns:a14="http://schemas.microsoft.com/office/drawing/2010/main" Requires="a14">
           <p:sp>
             <p:nvSpPr>
               <p:cNvPr id="16" name="テキスト ボックス 15">
@@ -10849,7 +10914,13 @@
                       <a:rPr lang="en-US" altLang="ja-JP" sz="2400" b="0" i="1" smtClean="0">
                         <a:latin typeface="Cambria Math" panose="02040503050406030204" pitchFamily="18" charset="0"/>
                       </a:rPr>
-                      <m:t>+86</m:t>
+                      <m:t>+</m:t>
+                    </m:r>
+                    <m:r>
+                      <a:rPr lang="en-US" altLang="ja-JP" sz="2400" b="0" i="1" smtClean="0">
+                        <a:latin typeface="Cambria Math" panose="02040503050406030204" pitchFamily="18" charset="0"/>
+                      </a:rPr>
+                      <m:t>86</m:t>
                     </m:r>
                     <m:r>
                       <a:rPr lang="en-US" altLang="ja-JP" sz="2400" b="0" i="1" smtClean="0">
@@ -10935,7 +11006,7 @@
             </p:txBody>
           </p:sp>
         </mc:Choice>
-        <mc:Fallback xmlns="">
+        <mc:Fallback>
           <p:sp>
             <p:nvSpPr>
               <p:cNvPr id="16" name="テキスト ボックス 15">
